--- a/docs/EdSynapse-Demo.pptx
+++ b/docs/EdSynapse-Demo.pptx
@@ -5,15 +5,17 @@
     <p:sldMasterId id="2147483648" r:id="rId1"/>
   </p:sldMasterIdLst>
   <p:notesMasterIdLst>
-    <p:notesMasterId r:id="rId8"/>
+    <p:notesMasterId r:id="rId10"/>
   </p:notesMasterIdLst>
   <p:sldIdLst>
     <p:sldId id="264" r:id="rId2"/>
     <p:sldId id="257" r:id="rId3"/>
-    <p:sldId id="258" r:id="rId4"/>
-    <p:sldId id="259" r:id="rId5"/>
-    <p:sldId id="260" r:id="rId6"/>
-    <p:sldId id="265" r:id="rId7"/>
+    <p:sldId id="259" r:id="rId4"/>
+    <p:sldId id="258" r:id="rId5"/>
+    <p:sldId id="271" r:id="rId6"/>
+    <p:sldId id="273" r:id="rId7"/>
+    <p:sldId id="260" r:id="rId8"/>
+    <p:sldId id="265" r:id="rId9"/>
   </p:sldIdLst>
   <p:sldSz cx="12192000" cy="6858000"/>
   <p:notesSz cx="6858000" cy="12192000"/>
@@ -462,7 +464,7 @@
           <a:p>
             <a:r>
               <a:rPr lang="en-US" dirty="0"/>
-              <a:t>0:45-1:15 — Here's the architecture. A request hits Vercel's edge gate, then a serverless function, which talks to Amazon Aurora. The key choice: Aurora with pgvector does BOTH jobs in one database — it stores the relational app data AND the RAG vectors for grounding, so there's no second vector system to run or sync. And there's no database password anywhere: Vercel's OIDC identity mints a short-lived AWS IAM token for every connection. Below Vercel are the external services — OpenAI for chat and embeddings, Resend for email, and the Google feedback form.</a:t>
+              <a:t>1:15-2:40 — LIVE DEMO (screen recording). Walk it in this order: (1) As a teacher, create a course, show the join code, upload a PDF — mention it's parsed, chunked, embedded into Aurora/pgvector. (2) As a student, join by code, take the diagnostic, show the strengths &amp; gaps map. (3) Open the AI Tutor — ask something answerable from the uploaded file and point out the source citations appear (grounding). (4) Take the assessment, show it grading and updating the knowledge map, then flip to the teacher analytics. Keep this section the longest.</a:t>
             </a:r>
           </a:p>
         </p:txBody>
@@ -549,7 +551,7 @@
           <a:p>
             <a:r>
               <a:rPr lang="en-US" dirty="0"/>
-              <a:t>1:15-2:40 — LIVE DEMO (screen recording). Walk it in this order: (1) As a teacher, create a course, show the join code, upload a PDF — mention it's parsed, chunked, embedded into Aurora/pgvector. (2) As a student, join by code, take the diagnostic, show the strengths &amp; gaps map. (3) Open the AI Tutor — ask something answerable from the uploaded file and point out the source citations appear (grounding). (4) Take the assessment, show it grading and updating the knowledge map, then flip to the teacher analytics. Keep this section the longest.</a:t>
+              <a:t>0:45-1:15 — Here's the architecture. A request hits Vercel's edge gate, then a serverless function, which talks to Amazon Aurora. The key choice: Aurora with pgvector does BOTH jobs in one database — it stores the relational app data AND the RAG vectors for grounding, so there's no second vector system to run or sync. And there's no database password anywhere: Vercel's OIDC identity mints a short-lived AWS IAM token for every connection. Below Vercel are the external services — OpenAI for chat and embeddings, Resend for email, and the Google feedback form.</a:t>
             </a:r>
           </a:p>
         </p:txBody>
@@ -658,7 +660,7 @@
           <a:p>
             <a:fld id="{F7021451-1387-4CA6-816F-3879F97B5CBC}" type="slidenum">
               <a:rPr lang="en-US"/>
-              <a:t>5</a:t>
+              <a:t>7</a:t>
             </a:fld>
             <a:endParaRPr lang="en-US"/>
           </a:p>
@@ -745,7 +747,7 @@
           <a:p>
             <a:fld id="{F7021451-1387-4CA6-816F-3879F97B5CBC}" type="slidenum">
               <a:rPr lang="en-US"/>
-              <a:t>6</a:t>
+              <a:t>8</a:t>
             </a:fld>
             <a:endParaRPr lang="en-US"/>
           </a:p>
@@ -2301,6 +2303,632 @@
 
 <file path=ppt/slides/slide3.xml><?xml version="1.0" encoding="utf-8"?>
 <p:sld xmlns:a="http://schemas.openxmlformats.org/drawingml/2006/main" xmlns:r="http://schemas.openxmlformats.org/officeDocument/2006/relationships" xmlns:p="http://schemas.openxmlformats.org/presentationml/2006/main">
+  <p:cSld name="Slide 4">
+    <p:bg>
+      <p:bgPr>
+        <a:solidFill>
+          <a:srgbClr val="1E3A8A"/>
+        </a:solidFill>
+        <a:effectLst/>
+      </p:bgPr>
+    </p:bg>
+    <p:spTree>
+      <p:nvGrpSpPr>
+        <p:cNvPr id="1" name=""/>
+        <p:cNvGrpSpPr/>
+        <p:nvPr/>
+      </p:nvGrpSpPr>
+      <p:grpSpPr>
+        <a:xfrm>
+          <a:off x="0" y="0"/>
+          <a:ext cx="0" cy="0"/>
+          <a:chOff x="0" y="0"/>
+          <a:chExt cx="0" cy="0"/>
+        </a:xfrm>
+      </p:grpSpPr>
+      <p:sp>
+        <p:nvSpPr>
+          <p:cNvPr id="2" name="Shape 0"/>
+          <p:cNvSpPr/>
+          <p:nvPr/>
+        </p:nvSpPr>
+        <p:spPr>
+          <a:xfrm>
+            <a:off x="-2286000" y="3108960"/>
+            <a:ext cx="5943600" cy="5943600"/>
+          </a:xfrm>
+          <a:prstGeom prst="ellipse">
+            <a:avLst/>
+          </a:prstGeom>
+          <a:solidFill>
+            <a:srgbClr val="16307A"/>
+          </a:solidFill>
+          <a:ln/>
+        </p:spPr>
+        <p:txBody>
+          <a:bodyPr/>
+          <a:lstStyle/>
+          <a:p>
+            <a:endParaRPr lang="en-CA"/>
+          </a:p>
+        </p:txBody>
+      </p:sp>
+      <p:sp>
+        <p:nvSpPr>
+          <p:cNvPr id="3" name="Text 1"/>
+          <p:cNvSpPr/>
+          <p:nvPr/>
+        </p:nvSpPr>
+        <p:spPr>
+          <a:xfrm>
+            <a:off x="822960" y="868680"/>
+            <a:ext cx="10058400" cy="457200"/>
+          </a:xfrm>
+          <a:prstGeom prst="rect">
+            <a:avLst/>
+          </a:prstGeom>
+          <a:noFill/>
+          <a:ln/>
+        </p:spPr>
+        <p:txBody>
+          <a:bodyPr wrap="square" lIns="0" tIns="0" rIns="0" bIns="0" rtlCol="0" anchor="ctr"/>
+          <a:lstStyle/>
+          <a:p>
+            <a:pPr marL="0" indent="0">
+              <a:buNone/>
+            </a:pPr>
+            <a:r>
+              <a:rPr lang="en-US" sz="1600" b="1" kern="0" spc="300" dirty="0">
+                <a:solidFill>
+                  <a:srgbClr val="BFDBFE"/>
+                </a:solidFill>
+                <a:latin typeface="Calibri" pitchFamily="34" charset="0"/>
+                <a:ea typeface="Calibri" pitchFamily="34" charset="-122"/>
+                <a:cs typeface="Calibri" pitchFamily="34" charset="-120"/>
+              </a:rPr>
+              <a:t>LIVE DEMO</a:t>
+            </a:r>
+            <a:endParaRPr lang="en-US" sz="1600" dirty="0"/>
+          </a:p>
+        </p:txBody>
+      </p:sp>
+      <p:sp>
+        <p:nvSpPr>
+          <p:cNvPr id="4" name="Text 2"/>
+          <p:cNvSpPr/>
+          <p:nvPr/>
+        </p:nvSpPr>
+        <p:spPr>
+          <a:xfrm>
+            <a:off x="777240" y="1371600"/>
+            <a:ext cx="10515600" cy="914400"/>
+          </a:xfrm>
+          <a:prstGeom prst="rect">
+            <a:avLst/>
+          </a:prstGeom>
+          <a:noFill/>
+          <a:ln/>
+        </p:spPr>
+        <p:txBody>
+          <a:bodyPr wrap="square" lIns="0" tIns="0" rIns="0" bIns="0" rtlCol="0" anchor="ctr"/>
+          <a:lstStyle/>
+          <a:p>
+            <a:pPr marL="0" indent="0">
+              <a:buNone/>
+            </a:pPr>
+            <a:r>
+              <a:rPr lang="en-US" sz="5000" b="1" dirty="0">
+                <a:solidFill>
+                  <a:srgbClr val="FFFFFF"/>
+                </a:solidFill>
+                <a:latin typeface="Cambria" pitchFamily="34" charset="0"/>
+                <a:ea typeface="Cambria" pitchFamily="34" charset="-122"/>
+                <a:cs typeface="Cambria" pitchFamily="34" charset="-120"/>
+              </a:rPr>
+              <a:t>See it working</a:t>
+            </a:r>
+            <a:endParaRPr lang="en-US" sz="5000" dirty="0"/>
+          </a:p>
+        </p:txBody>
+      </p:sp>
+      <p:sp>
+        <p:nvSpPr>
+          <p:cNvPr id="5" name="Shape 3"/>
+          <p:cNvSpPr/>
+          <p:nvPr/>
+        </p:nvSpPr>
+        <p:spPr>
+          <a:xfrm>
+            <a:off x="868680" y="2697480"/>
+            <a:ext cx="502920" cy="502920"/>
+          </a:xfrm>
+          <a:prstGeom prst="ellipse">
+            <a:avLst/>
+          </a:prstGeom>
+          <a:solidFill>
+            <a:srgbClr val="FF9900"/>
+          </a:solidFill>
+          <a:ln/>
+        </p:spPr>
+        <p:txBody>
+          <a:bodyPr/>
+          <a:lstStyle/>
+          <a:p>
+            <a:endParaRPr lang="en-CA"/>
+          </a:p>
+        </p:txBody>
+      </p:sp>
+      <p:sp>
+        <p:nvSpPr>
+          <p:cNvPr id="6" name="Text 4"/>
+          <p:cNvSpPr/>
+          <p:nvPr/>
+        </p:nvSpPr>
+        <p:spPr>
+          <a:xfrm>
+            <a:off x="868680" y="2697480"/>
+            <a:ext cx="502920" cy="502920"/>
+          </a:xfrm>
+          <a:prstGeom prst="rect">
+            <a:avLst/>
+          </a:prstGeom>
+          <a:noFill/>
+          <a:ln/>
+        </p:spPr>
+        <p:txBody>
+          <a:bodyPr wrap="square" lIns="0" tIns="0" rIns="0" bIns="0" rtlCol="0" anchor="ctr"/>
+          <a:lstStyle/>
+          <a:p>
+            <a:pPr marL="0" indent="0" algn="ctr">
+              <a:buNone/>
+            </a:pPr>
+            <a:r>
+              <a:rPr lang="en-US" sz="1800" b="1" dirty="0">
+                <a:solidFill>
+                  <a:srgbClr val="232F3E"/>
+                </a:solidFill>
+                <a:latin typeface="Calibri" pitchFamily="34" charset="0"/>
+                <a:ea typeface="Calibri" pitchFamily="34" charset="-122"/>
+                <a:cs typeface="Calibri" pitchFamily="34" charset="-120"/>
+              </a:rPr>
+              <a:t>1</a:t>
+            </a:r>
+            <a:endParaRPr lang="en-US" sz="1800" dirty="0"/>
+          </a:p>
+        </p:txBody>
+      </p:sp>
+      <p:sp>
+        <p:nvSpPr>
+          <p:cNvPr id="7" name="Text 5"/>
+          <p:cNvSpPr/>
+          <p:nvPr/>
+        </p:nvSpPr>
+        <p:spPr>
+          <a:xfrm>
+            <a:off x="1600200" y="2660904"/>
+            <a:ext cx="9784080" cy="566928"/>
+          </a:xfrm>
+          <a:prstGeom prst="rect">
+            <a:avLst/>
+          </a:prstGeom>
+          <a:noFill/>
+          <a:ln/>
+        </p:spPr>
+        <p:txBody>
+          <a:bodyPr wrap="square" lIns="0" tIns="0" rIns="0" bIns="0" rtlCol="0" anchor="ctr"/>
+          <a:lstStyle/>
+          <a:p>
+            <a:pPr marL="0" indent="0">
+              <a:buNone/>
+            </a:pPr>
+            <a:r>
+              <a:rPr lang="en-US" sz="1600" b="1" dirty="0">
+                <a:solidFill>
+                  <a:srgbClr val="FFFFFF"/>
+                </a:solidFill>
+                <a:latin typeface="Calibri" pitchFamily="34" charset="0"/>
+                <a:ea typeface="Calibri" pitchFamily="34" charset="-122"/>
+                <a:cs typeface="Calibri" pitchFamily="34" charset="-120"/>
+              </a:rPr>
+              <a:t>Teacher   </a:t>
+            </a:r>
+            <a:r>
+              <a:rPr lang="en-US" sz="1600" dirty="0">
+                <a:solidFill>
+                  <a:srgbClr val="C9D7F5"/>
+                </a:solidFill>
+                <a:latin typeface="Calibri" pitchFamily="34" charset="0"/>
+                <a:ea typeface="Calibri" pitchFamily="34" charset="-122"/>
+                <a:cs typeface="Calibri" pitchFamily="34" charset="-120"/>
+              </a:rPr>
+              <a:t>Create a course + join code, upload material — it's chunked &amp; embedded into Aurora/pgvector.</a:t>
+            </a:r>
+            <a:endParaRPr lang="en-US" sz="1600" dirty="0"/>
+          </a:p>
+        </p:txBody>
+      </p:sp>
+      <p:sp>
+        <p:nvSpPr>
+          <p:cNvPr id="8" name="Shape 6"/>
+          <p:cNvSpPr/>
+          <p:nvPr/>
+        </p:nvSpPr>
+        <p:spPr>
+          <a:xfrm>
+            <a:off x="868680" y="3538728"/>
+            <a:ext cx="502920" cy="502920"/>
+          </a:xfrm>
+          <a:prstGeom prst="ellipse">
+            <a:avLst/>
+          </a:prstGeom>
+          <a:solidFill>
+            <a:srgbClr val="FF9900"/>
+          </a:solidFill>
+          <a:ln/>
+        </p:spPr>
+        <p:txBody>
+          <a:bodyPr/>
+          <a:lstStyle/>
+          <a:p>
+            <a:endParaRPr lang="en-CA"/>
+          </a:p>
+        </p:txBody>
+      </p:sp>
+      <p:sp>
+        <p:nvSpPr>
+          <p:cNvPr id="9" name="Text 7"/>
+          <p:cNvSpPr/>
+          <p:nvPr/>
+        </p:nvSpPr>
+        <p:spPr>
+          <a:xfrm>
+            <a:off x="868680" y="3538728"/>
+            <a:ext cx="502920" cy="502920"/>
+          </a:xfrm>
+          <a:prstGeom prst="rect">
+            <a:avLst/>
+          </a:prstGeom>
+          <a:noFill/>
+          <a:ln/>
+        </p:spPr>
+        <p:txBody>
+          <a:bodyPr wrap="square" lIns="0" tIns="0" rIns="0" bIns="0" rtlCol="0" anchor="ctr"/>
+          <a:lstStyle/>
+          <a:p>
+            <a:pPr marL="0" indent="0" algn="ctr">
+              <a:buNone/>
+            </a:pPr>
+            <a:r>
+              <a:rPr lang="en-US" sz="1800" b="1" dirty="0">
+                <a:solidFill>
+                  <a:srgbClr val="232F3E"/>
+                </a:solidFill>
+                <a:latin typeface="Calibri" pitchFamily="34" charset="0"/>
+                <a:ea typeface="Calibri" pitchFamily="34" charset="-122"/>
+                <a:cs typeface="Calibri" pitchFamily="34" charset="-120"/>
+              </a:rPr>
+              <a:t>2</a:t>
+            </a:r>
+            <a:endParaRPr lang="en-US" sz="1800" dirty="0"/>
+          </a:p>
+        </p:txBody>
+      </p:sp>
+      <p:sp>
+        <p:nvSpPr>
+          <p:cNvPr id="10" name="Text 8"/>
+          <p:cNvSpPr/>
+          <p:nvPr/>
+        </p:nvSpPr>
+        <p:spPr>
+          <a:xfrm>
+            <a:off x="1600200" y="3502152"/>
+            <a:ext cx="9784080" cy="566928"/>
+          </a:xfrm>
+          <a:prstGeom prst="rect">
+            <a:avLst/>
+          </a:prstGeom>
+          <a:noFill/>
+          <a:ln/>
+        </p:spPr>
+        <p:txBody>
+          <a:bodyPr wrap="square" lIns="0" tIns="0" rIns="0" bIns="0" rtlCol="0" anchor="ctr"/>
+          <a:lstStyle/>
+          <a:p>
+            <a:pPr marL="0" indent="0">
+              <a:buNone/>
+            </a:pPr>
+            <a:r>
+              <a:rPr lang="en-US" sz="1600" b="1" dirty="0">
+                <a:solidFill>
+                  <a:srgbClr val="FFFFFF"/>
+                </a:solidFill>
+                <a:latin typeface="Calibri" pitchFamily="34" charset="0"/>
+                <a:ea typeface="Calibri" pitchFamily="34" charset="-122"/>
+                <a:cs typeface="Calibri" pitchFamily="34" charset="-120"/>
+              </a:rPr>
+              <a:t>Diagnose   </a:t>
+            </a:r>
+            <a:r>
+              <a:rPr lang="en-US" sz="1600" dirty="0">
+                <a:solidFill>
+                  <a:srgbClr val="C9D7F5"/>
+                </a:solidFill>
+                <a:latin typeface="Calibri" pitchFamily="34" charset="0"/>
+                <a:ea typeface="Calibri" pitchFamily="34" charset="-122"/>
+                <a:cs typeface="Calibri" pitchFamily="34" charset="-120"/>
+              </a:rPr>
+              <a:t>Student joins by code; an AI diagnostic seeds their strengths &amp; gaps map.</a:t>
+            </a:r>
+            <a:endParaRPr lang="en-US" sz="1600" dirty="0"/>
+          </a:p>
+        </p:txBody>
+      </p:sp>
+      <p:sp>
+        <p:nvSpPr>
+          <p:cNvPr id="11" name="Shape 9"/>
+          <p:cNvSpPr/>
+          <p:nvPr/>
+        </p:nvSpPr>
+        <p:spPr>
+          <a:xfrm>
+            <a:off x="868680" y="4379976"/>
+            <a:ext cx="502920" cy="502920"/>
+          </a:xfrm>
+          <a:prstGeom prst="ellipse">
+            <a:avLst/>
+          </a:prstGeom>
+          <a:solidFill>
+            <a:srgbClr val="FF9900"/>
+          </a:solidFill>
+          <a:ln/>
+        </p:spPr>
+        <p:txBody>
+          <a:bodyPr/>
+          <a:lstStyle/>
+          <a:p>
+            <a:endParaRPr lang="en-CA"/>
+          </a:p>
+        </p:txBody>
+      </p:sp>
+      <p:sp>
+        <p:nvSpPr>
+          <p:cNvPr id="12" name="Text 10"/>
+          <p:cNvSpPr/>
+          <p:nvPr/>
+        </p:nvSpPr>
+        <p:spPr>
+          <a:xfrm>
+            <a:off x="868680" y="4379976"/>
+            <a:ext cx="502920" cy="502920"/>
+          </a:xfrm>
+          <a:prstGeom prst="rect">
+            <a:avLst/>
+          </a:prstGeom>
+          <a:noFill/>
+          <a:ln/>
+        </p:spPr>
+        <p:txBody>
+          <a:bodyPr wrap="square" lIns="0" tIns="0" rIns="0" bIns="0" rtlCol="0" anchor="ctr"/>
+          <a:lstStyle/>
+          <a:p>
+            <a:pPr marL="0" indent="0" algn="ctr">
+              <a:buNone/>
+            </a:pPr>
+            <a:r>
+              <a:rPr lang="en-US" sz="1800" b="1" dirty="0">
+                <a:solidFill>
+                  <a:srgbClr val="232F3E"/>
+                </a:solidFill>
+                <a:latin typeface="Calibri" pitchFamily="34" charset="0"/>
+                <a:ea typeface="Calibri" pitchFamily="34" charset="-122"/>
+                <a:cs typeface="Calibri" pitchFamily="34" charset="-120"/>
+              </a:rPr>
+              <a:t>3</a:t>
+            </a:r>
+            <a:endParaRPr lang="en-US" sz="1800" dirty="0"/>
+          </a:p>
+        </p:txBody>
+      </p:sp>
+      <p:sp>
+        <p:nvSpPr>
+          <p:cNvPr id="13" name="Text 11"/>
+          <p:cNvSpPr/>
+          <p:nvPr/>
+        </p:nvSpPr>
+        <p:spPr>
+          <a:xfrm>
+            <a:off x="1600200" y="4343400"/>
+            <a:ext cx="9784080" cy="566928"/>
+          </a:xfrm>
+          <a:prstGeom prst="rect">
+            <a:avLst/>
+          </a:prstGeom>
+          <a:noFill/>
+          <a:ln/>
+        </p:spPr>
+        <p:txBody>
+          <a:bodyPr wrap="square" lIns="0" tIns="0" rIns="0" bIns="0" rtlCol="0" anchor="ctr"/>
+          <a:lstStyle/>
+          <a:p>
+            <a:pPr marL="0" indent="0">
+              <a:buNone/>
+            </a:pPr>
+            <a:r>
+              <a:rPr lang="en-US" sz="1600" b="1" dirty="0">
+                <a:solidFill>
+                  <a:srgbClr val="FFFFFF"/>
+                </a:solidFill>
+                <a:latin typeface="Calibri" pitchFamily="34" charset="0"/>
+                <a:ea typeface="Calibri" pitchFamily="34" charset="-122"/>
+                <a:cs typeface="Calibri" pitchFamily="34" charset="-120"/>
+              </a:rPr>
+              <a:t>Teach + Check   </a:t>
+            </a:r>
+            <a:r>
+              <a:rPr lang="en-US" sz="1600" dirty="0">
+                <a:solidFill>
+                  <a:srgbClr val="C9D7F5"/>
+                </a:solidFill>
+                <a:latin typeface="Calibri" pitchFamily="34" charset="0"/>
+                <a:ea typeface="Calibri" pitchFamily="34" charset="-122"/>
+                <a:cs typeface="Calibri" pitchFamily="34" charset="-120"/>
+              </a:rPr>
+              <a:t>The grounded tutor streams answers from the student's own material and checks understanding live.</a:t>
+            </a:r>
+            <a:endParaRPr lang="en-US" sz="1600" dirty="0"/>
+          </a:p>
+        </p:txBody>
+      </p:sp>
+      <p:sp>
+        <p:nvSpPr>
+          <p:cNvPr id="14" name="Shape 12"/>
+          <p:cNvSpPr/>
+          <p:nvPr/>
+        </p:nvSpPr>
+        <p:spPr>
+          <a:xfrm>
+            <a:off x="868680" y="5221224"/>
+            <a:ext cx="502920" cy="502920"/>
+          </a:xfrm>
+          <a:prstGeom prst="ellipse">
+            <a:avLst/>
+          </a:prstGeom>
+          <a:solidFill>
+            <a:srgbClr val="FF9900"/>
+          </a:solidFill>
+          <a:ln/>
+        </p:spPr>
+        <p:txBody>
+          <a:bodyPr/>
+          <a:lstStyle/>
+          <a:p>
+            <a:endParaRPr lang="en-CA"/>
+          </a:p>
+        </p:txBody>
+      </p:sp>
+      <p:sp>
+        <p:nvSpPr>
+          <p:cNvPr id="15" name="Text 13"/>
+          <p:cNvSpPr/>
+          <p:nvPr/>
+        </p:nvSpPr>
+        <p:spPr>
+          <a:xfrm>
+            <a:off x="868680" y="5221224"/>
+            <a:ext cx="502920" cy="502920"/>
+          </a:xfrm>
+          <a:prstGeom prst="rect">
+            <a:avLst/>
+          </a:prstGeom>
+          <a:noFill/>
+          <a:ln/>
+        </p:spPr>
+        <p:txBody>
+          <a:bodyPr wrap="square" lIns="0" tIns="0" rIns="0" bIns="0" rtlCol="0" anchor="ctr"/>
+          <a:lstStyle/>
+          <a:p>
+            <a:pPr marL="0" indent="0" algn="ctr">
+              <a:buNone/>
+            </a:pPr>
+            <a:r>
+              <a:rPr lang="en-US" sz="1800" b="1" dirty="0">
+                <a:solidFill>
+                  <a:srgbClr val="232F3E"/>
+                </a:solidFill>
+                <a:latin typeface="Calibri" pitchFamily="34" charset="0"/>
+                <a:ea typeface="Calibri" pitchFamily="34" charset="-122"/>
+                <a:cs typeface="Calibri" pitchFamily="34" charset="-120"/>
+              </a:rPr>
+              <a:t>4</a:t>
+            </a:r>
+            <a:endParaRPr lang="en-US" sz="1800" dirty="0"/>
+          </a:p>
+        </p:txBody>
+      </p:sp>
+      <p:sp>
+        <p:nvSpPr>
+          <p:cNvPr id="16" name="Text 14"/>
+          <p:cNvSpPr/>
+          <p:nvPr/>
+        </p:nvSpPr>
+        <p:spPr>
+          <a:xfrm>
+            <a:off x="1600200" y="5184648"/>
+            <a:ext cx="9784080" cy="566928"/>
+          </a:xfrm>
+          <a:prstGeom prst="rect">
+            <a:avLst/>
+          </a:prstGeom>
+          <a:noFill/>
+          <a:ln/>
+        </p:spPr>
+        <p:txBody>
+          <a:bodyPr wrap="square" lIns="0" tIns="0" rIns="0" bIns="0" rtlCol="0" anchor="ctr"/>
+          <a:lstStyle/>
+          <a:p>
+            <a:pPr marL="0" indent="0">
+              <a:buNone/>
+            </a:pPr>
+            <a:r>
+              <a:rPr lang="en-US" sz="1600" b="1" dirty="0">
+                <a:solidFill>
+                  <a:srgbClr val="FFFFFF"/>
+                </a:solidFill>
+                <a:latin typeface="Calibri" pitchFamily="34" charset="0"/>
+                <a:ea typeface="Calibri" pitchFamily="34" charset="-122"/>
+                <a:cs typeface="Calibri" pitchFamily="34" charset="-120"/>
+              </a:rPr>
+              <a:t>Verify   </a:t>
+            </a:r>
+            <a:r>
+              <a:rPr lang="en-US" sz="1600" dirty="0">
+                <a:solidFill>
+                  <a:srgbClr val="C9D7F5"/>
+                </a:solidFill>
+                <a:latin typeface="Calibri" pitchFamily="34" charset="0"/>
+                <a:ea typeface="Calibri" pitchFamily="34" charset="-122"/>
+                <a:cs typeface="Calibri" pitchFamily="34" charset="-120"/>
+              </a:rPr>
+              <a:t>A graded assessment updates the knowledge map — and the teacher's cohort analytics.</a:t>
+            </a:r>
+            <a:endParaRPr lang="en-US" sz="1600" dirty="0"/>
+          </a:p>
+        </p:txBody>
+      </p:sp>
+      <p:pic>
+        <p:nvPicPr>
+          <p:cNvPr id="17" name="Image 0" descr="EdSynapse logo"/>
+          <p:cNvPicPr>
+            <a:picLocks noChangeAspect="1"/>
+          </p:cNvPicPr>
+          <p:nvPr/>
+        </p:nvPicPr>
+        <p:blipFill>
+          <a:blip r:embed="rId3"/>
+          <a:stretch>
+            <a:fillRect/>
+          </a:stretch>
+        </p:blipFill>
+        <p:spPr>
+          <a:xfrm>
+            <a:off x="11265408" y="292608"/>
+            <a:ext cx="640080" cy="640080"/>
+          </a:xfrm>
+          <a:prstGeom prst="rect">
+            <a:avLst/>
+          </a:prstGeom>
+        </p:spPr>
+      </p:pic>
+    </p:spTree>
+  </p:cSld>
+  <p:clrMapOvr>
+    <a:masterClrMapping/>
+  </p:clrMapOvr>
+</p:sld>
+</file>
+
+<file path=ppt/slides/slide4.xml><?xml version="1.0" encoding="utf-8"?>
+<p:sld xmlns:a="http://schemas.openxmlformats.org/drawingml/2006/main" xmlns:r="http://schemas.openxmlformats.org/officeDocument/2006/relationships" xmlns:p="http://schemas.openxmlformats.org/presentationml/2006/main">
   <p:cSld name="Slide 3">
     <p:bg>
       <p:bgPr>
@@ -4107,17 +4735,9 @@
 </p:sld>
 </file>
 
-<file path=ppt/slides/slide4.xml><?xml version="1.0" encoding="utf-8"?>
+<file path=ppt/slides/slide5.xml><?xml version="1.0" encoding="utf-8"?>
 <p:sld xmlns:a="http://schemas.openxmlformats.org/drawingml/2006/main" xmlns:r="http://schemas.openxmlformats.org/officeDocument/2006/relationships" xmlns:p="http://schemas.openxmlformats.org/presentationml/2006/main">
-  <p:cSld name="Slide 4">
-    <p:bg>
-      <p:bgPr>
-        <a:solidFill>
-          <a:srgbClr val="1E3A8A"/>
-        </a:solidFill>
-        <a:effectLst/>
-      </p:bgPr>
-    </p:bg>
+  <p:cSld>
     <p:spTree>
       <p:nvGrpSpPr>
         <p:cNvPr id="1" name=""/>
@@ -4134,598 +4754,1354 @@
       </p:grpSpPr>
       <p:sp>
         <p:nvSpPr>
-          <p:cNvPr id="2" name="Shape 0"/>
-          <p:cNvSpPr/>
-          <p:nvPr/>
-        </p:nvSpPr>
-        <p:spPr>
-          <a:xfrm>
-            <a:off x="-2286000" y="3108960"/>
-            <a:ext cx="5943600" cy="5943600"/>
-          </a:xfrm>
-          <a:prstGeom prst="ellipse">
+          <p:cNvPr id="2" name="TextBox 1">
+            <a:extLst>
+              <a:ext uri="{FF2B5EF4-FFF2-40B4-BE49-F238E27FC236}">
+                <a16:creationId xmlns:a16="http://schemas.microsoft.com/office/drawing/2014/main" id="{805F2F50-B840-4B31-AEC8-52561915EBD2}"/>
+              </a:ext>
+            </a:extLst>
+          </p:cNvPr>
+          <p:cNvSpPr txBox="1"/>
+          <p:nvPr/>
+        </p:nvSpPr>
+        <p:spPr>
+          <a:xfrm>
+            <a:off x="508000" y="279400"/>
+            <a:ext cx="11176000" cy="533400"/>
+          </a:xfrm>
+          <a:prstGeom prst="rect">
+            <a:avLst/>
+          </a:prstGeom>
+          <a:noFill/>
+          <a:ln>
+            <a:noFill/>
+          </a:ln>
+        </p:spPr>
+        <p:txBody>
+          <a:bodyPr vertOverflow="overflow" vert="horz" wrap="square" rtlCol="0" anchor="t">
+            <a:spAutoFit/>
+          </a:bodyPr>
+          <a:lstStyle/>
+          <a:p>
+            <a:pPr algn="l"/>
+            <a:r>
+              <a:rPr lang="en-US" sz="2800" b="1">
+                <a:solidFill>
+                  <a:srgbClr val="1E3A8A"/>
+                </a:solidFill>
+                <a:latin typeface="Cambria"/>
+                <a:ea typeface="Cambria"/>
+              </a:rPr>
+              <a:t>How a tutor turn works — live request flow</a:t>
+            </a:r>
+            <a:endParaRPr lang="en-CA" sz="2800" b="1">
+              <a:solidFill>
+                <a:srgbClr val="1E3A8A"/>
+              </a:solidFill>
+              <a:latin typeface="Cambria"/>
+              <a:ea typeface="Cambria"/>
+            </a:endParaRPr>
+          </a:p>
+        </p:txBody>
+      </p:sp>
+      <p:sp>
+        <p:nvSpPr>
+          <p:cNvPr id="3" name="TextBox 2">
+            <a:extLst>
+              <a:ext uri="{FF2B5EF4-FFF2-40B4-BE49-F238E27FC236}">
+                <a16:creationId xmlns:a16="http://schemas.microsoft.com/office/drawing/2014/main" id="{5C4721F0-45BC-426B-84DB-DDE1CF62C086}"/>
+              </a:ext>
+            </a:extLst>
+          </p:cNvPr>
+          <p:cNvSpPr txBox="1"/>
+          <p:nvPr/>
+        </p:nvSpPr>
+        <p:spPr>
+          <a:xfrm>
+            <a:off x="508000" y="812800"/>
+            <a:ext cx="11049000" cy="304800"/>
+          </a:xfrm>
+          <a:prstGeom prst="rect">
+            <a:avLst/>
+          </a:prstGeom>
+          <a:noFill/>
+          <a:ln>
+            <a:noFill/>
+          </a:ln>
+        </p:spPr>
+        <p:txBody>
+          <a:bodyPr vertOverflow="overflow" vert="horz" wrap="square" rtlCol="0" anchor="t">
+            <a:spAutoFit/>
+          </a:bodyPr>
+          <a:lstStyle/>
+          <a:p>
+            <a:pPr algn="l"/>
+            <a:r>
+              <a:rPr lang="en-US" sz="1300">
+                <a:solidFill>
+                  <a:srgbClr val="475569"/>
+                </a:solidFill>
+                <a:latin typeface="Calibri"/>
+                <a:ea typeface="Calibri"/>
+                <a:cs typeface="Calibri"/>
+              </a:rPr>
+              <a:t>Every question is grounded in the learner's own sources and recent conversation before the model ever responds.</a:t>
+            </a:r>
+            <a:endParaRPr lang="en-CA" sz="1300">
+              <a:solidFill>
+                <a:srgbClr val="475569"/>
+              </a:solidFill>
+              <a:latin typeface="Calibri"/>
+              <a:ea typeface="Calibri"/>
+              <a:cs typeface="Calibri"/>
+            </a:endParaRPr>
+          </a:p>
+        </p:txBody>
+      </p:sp>
+      <p:sp>
+        <p:nvSpPr>
+          <p:cNvPr id="4" name="Rectangle 3">
+            <a:extLst>
+              <a:ext uri="{FF2B5EF4-FFF2-40B4-BE49-F238E27FC236}">
+                <a16:creationId xmlns:a16="http://schemas.microsoft.com/office/drawing/2014/main" id="{C5B08EF9-79C0-4E9F-B431-1BE0426DFDA7}"/>
+              </a:ext>
+            </a:extLst>
+          </p:cNvPr>
+          <p:cNvSpPr/>
+          <p:nvPr/>
+        </p:nvSpPr>
+        <p:spPr>
+          <a:xfrm>
+            <a:off x="1397000" y="2667000"/>
+            <a:ext cx="6477000" cy="1244600"/>
+          </a:xfrm>
+          <a:prstGeom prst="rect">
             <a:avLst/>
           </a:prstGeom>
           <a:solidFill>
-            <a:srgbClr val="16307A"/>
+            <a:srgbClr val="FFFBEA"/>
           </a:solidFill>
-          <a:ln/>
-        </p:spPr>
-        <p:txBody>
-          <a:bodyPr/>
-          <a:lstStyle/>
-          <a:p>
-            <a:endParaRPr lang="en-CA"/>
-          </a:p>
-        </p:txBody>
-      </p:sp>
-      <p:sp>
-        <p:nvSpPr>
-          <p:cNvPr id="3" name="Text 1"/>
-          <p:cNvSpPr/>
-          <p:nvPr/>
-        </p:nvSpPr>
-        <p:spPr>
-          <a:xfrm>
-            <a:off x="822960" y="868680"/>
-            <a:ext cx="10058400" cy="457200"/>
+          <a:ln w="12700" cap="flat" cmpd="sng" algn="ctr">
+            <a:solidFill>
+              <a:srgbClr val="F0D9A8"/>
+            </a:solidFill>
+            <a:prstDash val="solid"/>
+            <a:miter lim="800000"/>
+          </a:ln>
+        </p:spPr>
+        <p:style>
+          <a:lnRef idx="2">
+            <a:schemeClr val="accent1">
+              <a:shade val="15000"/>
+            </a:schemeClr>
+          </a:lnRef>
+          <a:fillRef idx="1">
+            <a:schemeClr val="accent1"/>
+          </a:fillRef>
+          <a:effectRef idx="0">
+            <a:schemeClr val="accent1"/>
+          </a:effectRef>
+          <a:fontRef idx="minor">
+            <a:schemeClr val="lt1"/>
+          </a:fontRef>
+        </p:style>
+        <p:txBody>
+          <a:bodyPr wrap="square" lIns="90000" tIns="18000" rIns="36000" bIns="18000" anchor="t">
+            <a:normAutofit/>
+          </a:bodyPr>
+          <a:lstStyle/>
+          <a:p>
+            <a:pPr algn="l"/>
+            <a:r>
+              <a:rPr lang="en-US" sz="1050" b="1" dirty="0">
+                <a:solidFill>
+                  <a:srgbClr val="B45309"/>
+                </a:solidFill>
+                <a:latin typeface="Calibri"/>
+              </a:rPr>
+              <a:t>RETRIEVAL AT PROMPT TIME</a:t>
+            </a:r>
+          </a:p>
+        </p:txBody>
+      </p:sp>
+      <p:sp>
+        <p:nvSpPr>
+          <p:cNvPr id="5" name="Rectangle: Rounded Corners 4">
+            <a:extLst>
+              <a:ext uri="{FF2B5EF4-FFF2-40B4-BE49-F238E27FC236}">
+                <a16:creationId xmlns:a16="http://schemas.microsoft.com/office/drawing/2014/main" id="{36EB7E4D-E223-4033-A7EF-EBBB47EE627F}"/>
+              </a:ext>
+            </a:extLst>
+          </p:cNvPr>
+          <p:cNvSpPr/>
+          <p:nvPr/>
+        </p:nvSpPr>
+        <p:spPr>
+          <a:xfrm>
+            <a:off x="1524000" y="1219200"/>
+            <a:ext cx="3175000" cy="584200"/>
+          </a:xfrm>
+          <a:prstGeom prst="roundRect">
+            <a:avLst/>
+          </a:prstGeom>
+          <a:solidFill>
+            <a:srgbClr val="F0F6FF"/>
+          </a:solidFill>
+          <a:ln w="12700" cap="flat" cmpd="sng" algn="ctr">
+            <a:solidFill>
+              <a:srgbClr val="D5DEEC"/>
+            </a:solidFill>
+            <a:prstDash val="solid"/>
+            <a:miter lim="800000"/>
+          </a:ln>
+        </p:spPr>
+        <p:style>
+          <a:lnRef idx="2">
+            <a:schemeClr val="accent1">
+              <a:shade val="15000"/>
+            </a:schemeClr>
+          </a:lnRef>
+          <a:fillRef idx="1">
+            <a:schemeClr val="accent1"/>
+          </a:fillRef>
+          <a:effectRef idx="0">
+            <a:schemeClr val="accent1"/>
+          </a:effectRef>
+          <a:fontRef idx="minor">
+            <a:schemeClr val="lt1"/>
+          </a:fontRef>
+        </p:style>
+        <p:txBody>
+          <a:bodyPr wrap="square" lIns="36000" tIns="18000" rIns="36000" bIns="18000" anchor="ctr">
+            <a:normAutofit/>
+          </a:bodyPr>
+          <a:lstStyle/>
+          <a:p>
+            <a:pPr algn="ctr"/>
+            <a:r>
+              <a:rPr lang="en-US" sz="1300" b="1" dirty="0">
+                <a:solidFill>
+                  <a:srgbClr val="0F172A"/>
+                </a:solidFill>
+                <a:latin typeface="Calibri"/>
+              </a:rPr>
+              <a:t>Student message</a:t>
+            </a:r>
+          </a:p>
+          <a:p>
+            <a:pPr algn="ctr"/>
+            <a:r>
+              <a:rPr lang="en-US" sz="1000" b="0" dirty="0">
+                <a:solidFill>
+                  <a:srgbClr val="64748B"/>
+                </a:solidFill>
+                <a:latin typeface="Calibri"/>
+              </a:rPr>
+              <a:t>+ topic + preferences</a:t>
+            </a:r>
+          </a:p>
+        </p:txBody>
+      </p:sp>
+      <p:sp>
+        <p:nvSpPr>
+          <p:cNvPr id="6" name="Rectangle: Rounded Corners 5">
+            <a:extLst>
+              <a:ext uri="{FF2B5EF4-FFF2-40B4-BE49-F238E27FC236}">
+                <a16:creationId xmlns:a16="http://schemas.microsoft.com/office/drawing/2014/main" id="{2E81F833-D291-4CFF-952D-8F3843CEC84F}"/>
+              </a:ext>
+            </a:extLst>
+          </p:cNvPr>
+          <p:cNvSpPr/>
+          <p:nvPr/>
+        </p:nvSpPr>
+        <p:spPr>
+          <a:xfrm>
+            <a:off x="1524000" y="1981200"/>
+            <a:ext cx="3175000" cy="584200"/>
+          </a:xfrm>
+          <a:prstGeom prst="roundRect">
+            <a:avLst/>
+          </a:prstGeom>
+          <a:solidFill>
+            <a:srgbClr val="F0F6FF"/>
+          </a:solidFill>
+          <a:ln w="12700" cap="flat" cmpd="sng" algn="ctr">
+            <a:solidFill>
+              <a:srgbClr val="D5DEEC"/>
+            </a:solidFill>
+            <a:prstDash val="solid"/>
+            <a:miter lim="800000"/>
+          </a:ln>
+        </p:spPr>
+        <p:style>
+          <a:lnRef idx="2">
+            <a:schemeClr val="accent1">
+              <a:shade val="15000"/>
+            </a:schemeClr>
+          </a:lnRef>
+          <a:fillRef idx="1">
+            <a:schemeClr val="accent1"/>
+          </a:fillRef>
+          <a:effectRef idx="0">
+            <a:schemeClr val="accent1"/>
+          </a:effectRef>
+          <a:fontRef idx="minor">
+            <a:schemeClr val="lt1"/>
+          </a:fontRef>
+        </p:style>
+        <p:txBody>
+          <a:bodyPr wrap="square" lIns="36000" tIns="18000" rIns="36000" bIns="18000" anchor="ctr">
+            <a:normAutofit/>
+          </a:bodyPr>
+          <a:lstStyle/>
+          <a:p>
+            <a:pPr algn="ctr"/>
+            <a:r>
+              <a:rPr lang="en-US" sz="1300" b="1" dirty="0">
+                <a:solidFill>
+                  <a:srgbClr val="0F172A"/>
+                </a:solidFill>
+                <a:latin typeface="Calibri"/>
+              </a:rPr>
+              <a:t>Prompt assembler</a:t>
+            </a:r>
+          </a:p>
+          <a:p>
+            <a:pPr algn="ctr"/>
+            <a:r>
+              <a:rPr lang="en-US" sz="1000" b="0" dirty="0">
+                <a:solidFill>
+                  <a:srgbClr val="64748B"/>
+                </a:solidFill>
+                <a:latin typeface="Calibri"/>
+              </a:rPr>
+              <a:t>/api tutor route</a:t>
+            </a:r>
+          </a:p>
+        </p:txBody>
+      </p:sp>
+      <p:sp>
+        <p:nvSpPr>
+          <p:cNvPr id="7" name="Rectangle: Rounded Corners 6">
+            <a:extLst>
+              <a:ext uri="{FF2B5EF4-FFF2-40B4-BE49-F238E27FC236}">
+                <a16:creationId xmlns:a16="http://schemas.microsoft.com/office/drawing/2014/main" id="{E5381DF3-256A-44E8-9B9D-9CBAE3125ACB}"/>
+              </a:ext>
+            </a:extLst>
+          </p:cNvPr>
+          <p:cNvSpPr/>
+          <p:nvPr/>
+        </p:nvSpPr>
+        <p:spPr>
+          <a:xfrm>
+            <a:off x="1549400" y="2997200"/>
+            <a:ext cx="2984500" cy="762000"/>
+          </a:xfrm>
+          <a:prstGeom prst="roundRect">
+            <a:avLst/>
+          </a:prstGeom>
+          <a:solidFill>
+            <a:srgbClr val="FFFFFF"/>
+          </a:solidFill>
+          <a:ln w="12700" cap="flat" cmpd="sng" algn="ctr">
+            <a:solidFill>
+              <a:srgbClr val="E6CF92"/>
+            </a:solidFill>
+            <a:prstDash val="solid"/>
+            <a:miter lim="800000"/>
+          </a:ln>
+        </p:spPr>
+        <p:style>
+          <a:lnRef idx="2">
+            <a:schemeClr val="accent1">
+              <a:shade val="15000"/>
+            </a:schemeClr>
+          </a:lnRef>
+          <a:fillRef idx="1">
+            <a:schemeClr val="accent1"/>
+          </a:fillRef>
+          <a:effectRef idx="0">
+            <a:schemeClr val="accent1"/>
+          </a:effectRef>
+          <a:fontRef idx="minor">
+            <a:schemeClr val="lt1"/>
+          </a:fontRef>
+        </p:style>
+        <p:txBody>
+          <a:bodyPr wrap="square" lIns="36000" tIns="18000" rIns="36000" bIns="18000" anchor="ctr">
+            <a:normAutofit/>
+          </a:bodyPr>
+          <a:lstStyle/>
+          <a:p>
+            <a:pPr algn="ctr"/>
+            <a:r>
+              <a:rPr lang="en-US" sz="1200" b="1" dirty="0">
+                <a:solidFill>
+                  <a:srgbClr val="0F172A"/>
+                </a:solidFill>
+                <a:latin typeface="Calibri"/>
+              </a:rPr>
+              <a:t>Content RAG — pgvector</a:t>
+            </a:r>
+          </a:p>
+          <a:p>
+            <a:pPr algn="ctr"/>
+            <a:r>
+              <a:rPr lang="en-US" sz="1000" b="0" dirty="0">
+                <a:solidFill>
+                  <a:srgbClr val="64748B"/>
+                </a:solidFill>
+                <a:latin typeface="Calibri"/>
+              </a:rPr>
+              <a:t>source_chunks · authentic material</a:t>
+            </a:r>
+          </a:p>
+        </p:txBody>
+      </p:sp>
+      <p:sp>
+        <p:nvSpPr>
+          <p:cNvPr id="8" name="Rectangle: Rounded Corners 7">
+            <a:extLst>
+              <a:ext uri="{FF2B5EF4-FFF2-40B4-BE49-F238E27FC236}">
+                <a16:creationId xmlns:a16="http://schemas.microsoft.com/office/drawing/2014/main" id="{EE30F7EC-CDA1-414F-85A7-8BB4BA2E656E}"/>
+              </a:ext>
+            </a:extLst>
+          </p:cNvPr>
+          <p:cNvSpPr/>
+          <p:nvPr/>
+        </p:nvSpPr>
+        <p:spPr>
+          <a:xfrm>
+            <a:off x="4737100" y="2997200"/>
+            <a:ext cx="2984500" cy="762000"/>
+          </a:xfrm>
+          <a:prstGeom prst="roundRect">
+            <a:avLst/>
+          </a:prstGeom>
+          <a:solidFill>
+            <a:srgbClr val="FFFFFF"/>
+          </a:solidFill>
+          <a:ln w="12700" cap="flat" cmpd="sng" algn="ctr">
+            <a:solidFill>
+              <a:srgbClr val="E6CF92"/>
+            </a:solidFill>
+            <a:prstDash val="solid"/>
+            <a:miter lim="800000"/>
+          </a:ln>
+        </p:spPr>
+        <p:style>
+          <a:lnRef idx="2">
+            <a:schemeClr val="accent1">
+              <a:shade val="15000"/>
+            </a:schemeClr>
+          </a:lnRef>
+          <a:fillRef idx="1">
+            <a:schemeClr val="accent1"/>
+          </a:fillRef>
+          <a:effectRef idx="0">
+            <a:schemeClr val="accent1"/>
+          </a:effectRef>
+          <a:fontRef idx="minor">
+            <a:schemeClr val="lt1"/>
+          </a:fontRef>
+        </p:style>
+        <p:txBody>
+          <a:bodyPr wrap="square" lIns="36000" tIns="18000" rIns="36000" bIns="18000" anchor="ctr">
+            <a:normAutofit/>
+          </a:bodyPr>
+          <a:lstStyle/>
+          <a:p>
+            <a:pPr algn="ctr"/>
+            <a:r>
+              <a:rPr lang="en-US" sz="1200" b="1" dirty="0">
+                <a:solidFill>
+                  <a:srgbClr val="0F172A"/>
+                </a:solidFill>
+                <a:latin typeface="Calibri"/>
+              </a:rPr>
+              <a:t>Conversation history</a:t>
+            </a:r>
+          </a:p>
+          <a:p>
+            <a:pPr algn="ctr"/>
+            <a:r>
+              <a:rPr lang="en-US" sz="1000" b="0" dirty="0">
+                <a:solidFill>
+                  <a:srgbClr val="64748B"/>
+                </a:solidFill>
+                <a:latin typeface="Calibri"/>
+              </a:rPr>
+              <a:t>tutor_sessions.messages · recent turns</a:t>
+            </a:r>
+          </a:p>
+        </p:txBody>
+      </p:sp>
+      <p:sp>
+        <p:nvSpPr>
+          <p:cNvPr id="9" name="Rectangle: Rounded Corners 8">
+            <a:extLst>
+              <a:ext uri="{FF2B5EF4-FFF2-40B4-BE49-F238E27FC236}">
+                <a16:creationId xmlns:a16="http://schemas.microsoft.com/office/drawing/2014/main" id="{69652215-C8D6-44D0-9284-D70037AB3026}"/>
+              </a:ext>
+            </a:extLst>
+          </p:cNvPr>
+          <p:cNvSpPr/>
+          <p:nvPr/>
+        </p:nvSpPr>
+        <p:spPr>
+          <a:xfrm>
+            <a:off x="1524000" y="4089400"/>
+            <a:ext cx="3175000" cy="584200"/>
+          </a:xfrm>
+          <a:prstGeom prst="roundRect">
+            <a:avLst/>
+          </a:prstGeom>
+          <a:solidFill>
+            <a:srgbClr val="F0F6FF"/>
+          </a:solidFill>
+          <a:ln w="12700" cap="flat" cmpd="sng" algn="ctr">
+            <a:solidFill>
+              <a:srgbClr val="D5DEEC"/>
+            </a:solidFill>
+            <a:prstDash val="solid"/>
+            <a:miter lim="800000"/>
+          </a:ln>
+        </p:spPr>
+        <p:style>
+          <a:lnRef idx="2">
+            <a:schemeClr val="accent1">
+              <a:shade val="15000"/>
+            </a:schemeClr>
+          </a:lnRef>
+          <a:fillRef idx="1">
+            <a:schemeClr val="accent1"/>
+          </a:fillRef>
+          <a:effectRef idx="0">
+            <a:schemeClr val="accent1"/>
+          </a:effectRef>
+          <a:fontRef idx="minor">
+            <a:schemeClr val="lt1"/>
+          </a:fontRef>
+        </p:style>
+        <p:txBody>
+          <a:bodyPr wrap="square" lIns="36000" tIns="18000" rIns="36000" bIns="18000" anchor="ctr">
+            <a:normAutofit/>
+          </a:bodyPr>
+          <a:lstStyle/>
+          <a:p>
+            <a:pPr algn="ctr"/>
+            <a:r>
+              <a:rPr lang="en-US" sz="1300" b="1" dirty="0">
+                <a:solidFill>
+                  <a:srgbClr val="0F172A"/>
+                </a:solidFill>
+                <a:latin typeface="Calibri"/>
+              </a:rPr>
+              <a:t>Grounded prompt</a:t>
+            </a:r>
+          </a:p>
+          <a:p>
+            <a:pPr algn="ctr"/>
+            <a:r>
+              <a:rPr lang="en-US" sz="1000" b="0" dirty="0">
+                <a:solidFill>
+                  <a:srgbClr val="64748B"/>
+                </a:solidFill>
+                <a:latin typeface="Calibri"/>
+              </a:rPr>
+              <a:t>sources + history + modality/pace</a:t>
+            </a:r>
+          </a:p>
+        </p:txBody>
+      </p:sp>
+      <p:sp>
+        <p:nvSpPr>
+          <p:cNvPr id="10" name="Rectangle: Rounded Corners 9">
+            <a:extLst>
+              <a:ext uri="{FF2B5EF4-FFF2-40B4-BE49-F238E27FC236}">
+                <a16:creationId xmlns:a16="http://schemas.microsoft.com/office/drawing/2014/main" id="{71465898-C2CD-4DFE-A45B-831112B72061}"/>
+              </a:ext>
+            </a:extLst>
+          </p:cNvPr>
+          <p:cNvSpPr/>
+          <p:nvPr/>
+        </p:nvSpPr>
+        <p:spPr>
+          <a:xfrm>
+            <a:off x="1524000" y="4851400"/>
+            <a:ext cx="3175000" cy="533400"/>
+          </a:xfrm>
+          <a:prstGeom prst="roundRect">
+            <a:avLst/>
+          </a:prstGeom>
+          <a:solidFill>
+            <a:srgbClr val="E8ECFB"/>
+          </a:solidFill>
+          <a:ln w="12700" cap="flat" cmpd="sng" algn="ctr">
+            <a:solidFill>
+              <a:srgbClr val="C3CBEF"/>
+            </a:solidFill>
+            <a:prstDash val="solid"/>
+            <a:miter lim="800000"/>
+          </a:ln>
+        </p:spPr>
+        <p:style>
+          <a:lnRef idx="2">
+            <a:schemeClr val="accent1">
+              <a:shade val="15000"/>
+            </a:schemeClr>
+          </a:lnRef>
+          <a:fillRef idx="1">
+            <a:schemeClr val="accent1"/>
+          </a:fillRef>
+          <a:effectRef idx="0">
+            <a:schemeClr val="accent1"/>
+          </a:effectRef>
+          <a:fontRef idx="minor">
+            <a:schemeClr val="lt1"/>
+          </a:fontRef>
+        </p:style>
+        <p:txBody>
+          <a:bodyPr wrap="square" lIns="36000" tIns="18000" rIns="36000" bIns="18000" anchor="ctr">
+            <a:normAutofit/>
+          </a:bodyPr>
+          <a:lstStyle/>
+          <a:p>
+            <a:pPr algn="ctr"/>
+            <a:r>
+              <a:rPr lang="en-US" sz="1300" b="1" dirty="0">
+                <a:solidFill>
+                  <a:srgbClr val="0F172A"/>
+                </a:solidFill>
+                <a:latin typeface="Calibri"/>
+              </a:rPr>
+              <a:t>OpenAI — streaming chat</a:t>
+            </a:r>
+          </a:p>
+        </p:txBody>
+      </p:sp>
+      <p:sp>
+        <p:nvSpPr>
+          <p:cNvPr id="11" name="Rectangle: Rounded Corners 10">
+            <a:extLst>
+              <a:ext uri="{FF2B5EF4-FFF2-40B4-BE49-F238E27FC236}">
+                <a16:creationId xmlns:a16="http://schemas.microsoft.com/office/drawing/2014/main" id="{D5E9D936-BEAB-4A8F-A3B8-D1B2B797D0D2}"/>
+              </a:ext>
+            </a:extLst>
+          </p:cNvPr>
+          <p:cNvSpPr/>
+          <p:nvPr/>
+        </p:nvSpPr>
+        <p:spPr>
+          <a:xfrm>
+            <a:off x="1397000" y="5588000"/>
+            <a:ext cx="2946400" cy="711200"/>
+          </a:xfrm>
+          <a:prstGeom prst="roundRect">
+            <a:avLst/>
+          </a:prstGeom>
+          <a:solidFill>
+            <a:srgbClr val="F0F6FF"/>
+          </a:solidFill>
+          <a:ln w="12700" cap="flat" cmpd="sng" algn="ctr">
+            <a:solidFill>
+              <a:srgbClr val="D5DEEC"/>
+            </a:solidFill>
+            <a:prstDash val="solid"/>
+            <a:miter lim="800000"/>
+          </a:ln>
+        </p:spPr>
+        <p:style>
+          <a:lnRef idx="2">
+            <a:schemeClr val="accent1">
+              <a:shade val="15000"/>
+            </a:schemeClr>
+          </a:lnRef>
+          <a:fillRef idx="1">
+            <a:schemeClr val="accent1"/>
+          </a:fillRef>
+          <a:effectRef idx="0">
+            <a:schemeClr val="accent1"/>
+          </a:effectRef>
+          <a:fontRef idx="minor">
+            <a:schemeClr val="lt1"/>
+          </a:fontRef>
+        </p:style>
+        <p:txBody>
+          <a:bodyPr wrap="square" lIns="36000" tIns="18000" rIns="36000" bIns="18000" anchor="ctr">
+            <a:normAutofit/>
+          </a:bodyPr>
+          <a:lstStyle/>
+          <a:p>
+            <a:pPr algn="ctr"/>
+            <a:r>
+              <a:rPr lang="en-US" sz="1300" b="1" dirty="0">
+                <a:solidFill>
+                  <a:srgbClr val="0F172A"/>
+                </a:solidFill>
+                <a:latin typeface="Calibri"/>
+              </a:rPr>
+              <a:t>SSE reply</a:t>
+            </a:r>
+          </a:p>
+          <a:p>
+            <a:pPr algn="ctr"/>
+            <a:r>
+              <a:rPr lang="en-US" sz="1000" b="0" dirty="0">
+                <a:solidFill>
+                  <a:srgbClr val="64748B"/>
+                </a:solidFill>
+                <a:latin typeface="Calibri"/>
+              </a:rPr>
+              <a:t>+ source citations</a:t>
+            </a:r>
+          </a:p>
+        </p:txBody>
+      </p:sp>
+      <p:sp>
+        <p:nvSpPr>
+          <p:cNvPr id="12" name="Rectangle: Rounded Corners 11">
+            <a:extLst>
+              <a:ext uri="{FF2B5EF4-FFF2-40B4-BE49-F238E27FC236}">
+                <a16:creationId xmlns:a16="http://schemas.microsoft.com/office/drawing/2014/main" id="{EA071A7E-9A31-473D-B526-7EC58547C24E}"/>
+              </a:ext>
+            </a:extLst>
+          </p:cNvPr>
+          <p:cNvSpPr/>
+          <p:nvPr/>
+        </p:nvSpPr>
+        <p:spPr>
+          <a:xfrm>
+            <a:off x="4572000" y="5588000"/>
+            <a:ext cx="3175000" cy="711200"/>
+          </a:xfrm>
+          <a:prstGeom prst="roundRect">
+            <a:avLst/>
+          </a:prstGeom>
+          <a:solidFill>
+            <a:srgbClr val="F0F6FF"/>
+          </a:solidFill>
+          <a:ln w="12700" cap="flat" cmpd="sng" algn="ctr">
+            <a:solidFill>
+              <a:srgbClr val="D5DEEC"/>
+            </a:solidFill>
+            <a:prstDash val="solid"/>
+            <a:miter lim="800000"/>
+          </a:ln>
+        </p:spPr>
+        <p:style>
+          <a:lnRef idx="2">
+            <a:schemeClr val="accent1">
+              <a:shade val="15000"/>
+            </a:schemeClr>
+          </a:lnRef>
+          <a:fillRef idx="1">
+            <a:schemeClr val="accent1"/>
+          </a:fillRef>
+          <a:effectRef idx="0">
+            <a:schemeClr val="accent1"/>
+          </a:effectRef>
+          <a:fontRef idx="minor">
+            <a:schemeClr val="lt1"/>
+          </a:fontRef>
+        </p:style>
+        <p:txBody>
+          <a:bodyPr wrap="square" lIns="36000" tIns="18000" rIns="36000" bIns="18000" anchor="ctr">
+            <a:normAutofit/>
+          </a:bodyPr>
+          <a:lstStyle/>
+          <a:p>
+            <a:pPr algn="ctr"/>
+            <a:r>
+              <a:rPr lang="en-US" sz="1300" b="1" dirty="0">
+                <a:solidFill>
+                  <a:srgbClr val="0F172A"/>
+                </a:solidFill>
+                <a:latin typeface="Calibri"/>
+              </a:rPr>
+              <a:t>Append turn</a:t>
+            </a:r>
+          </a:p>
+          <a:p>
+            <a:pPr algn="ctr"/>
+            <a:r>
+              <a:rPr lang="en-US" sz="1000" b="0" dirty="0">
+                <a:solidFill>
+                  <a:srgbClr val="64748B"/>
+                </a:solidFill>
+                <a:latin typeface="Calibri"/>
+              </a:rPr>
+              <a:t>→ tutor_sessions.messages</a:t>
+            </a:r>
+          </a:p>
+        </p:txBody>
+      </p:sp>
+      <p:sp>
+        <p:nvSpPr>
+          <p:cNvPr id="13" name="Cylinder 12">
+            <a:extLst>
+              <a:ext uri="{FF2B5EF4-FFF2-40B4-BE49-F238E27FC236}">
+                <a16:creationId xmlns:a16="http://schemas.microsoft.com/office/drawing/2014/main" id="{BDE9E95D-3E32-4BF9-B7D4-72048FE4AA42}"/>
+              </a:ext>
+            </a:extLst>
+          </p:cNvPr>
+          <p:cNvSpPr/>
+          <p:nvPr/>
+        </p:nvSpPr>
+        <p:spPr>
+          <a:xfrm>
+            <a:off x="8890000" y="5461000"/>
+            <a:ext cx="2286000" cy="1168400"/>
+          </a:xfrm>
+          <a:prstGeom prst="can">
+            <a:avLst/>
+          </a:prstGeom>
+          <a:solidFill>
+            <a:srgbClr val="4F46E5"/>
+          </a:solidFill>
+          <a:ln w="12700" cap="flat" cmpd="sng" algn="ctr">
+            <a:solidFill>
+              <a:srgbClr val="3730A3"/>
+            </a:solidFill>
+            <a:prstDash val="solid"/>
+            <a:miter lim="800000"/>
+          </a:ln>
+        </p:spPr>
+        <p:style>
+          <a:lnRef idx="2">
+            <a:schemeClr val="accent1">
+              <a:shade val="15000"/>
+            </a:schemeClr>
+          </a:lnRef>
+          <a:fillRef idx="1">
+            <a:schemeClr val="accent1"/>
+          </a:fillRef>
+          <a:effectRef idx="0">
+            <a:schemeClr val="accent1"/>
+          </a:effectRef>
+          <a:fontRef idx="minor">
+            <a:schemeClr val="lt1"/>
+          </a:fontRef>
+        </p:style>
+        <p:txBody>
+          <a:bodyPr wrap="square" lIns="36000" tIns="18000" rIns="36000" bIns="18000" anchor="ctr">
+            <a:normAutofit/>
+          </a:bodyPr>
+          <a:lstStyle/>
+          <a:p>
+            <a:pPr algn="ctr"/>
+            <a:r>
+              <a:rPr lang="en-US" sz="1300" b="1" dirty="0">
+                <a:solidFill>
+                  <a:srgbClr val="FFFFFF"/>
+                </a:solidFill>
+                <a:latin typeface="Calibri"/>
+              </a:rPr>
+              <a:t>AWS Aurora</a:t>
+            </a:r>
+          </a:p>
+          <a:p>
+            <a:pPr algn="ctr"/>
+            <a:r>
+              <a:rPr lang="en-US" sz="1050" b="0" dirty="0">
+                <a:solidFill>
+                  <a:srgbClr val="E0E2FF"/>
+                </a:solidFill>
+                <a:latin typeface="Calibri"/>
+              </a:rPr>
+              <a:t>+ pgvector</a:t>
+            </a:r>
+          </a:p>
+        </p:txBody>
+      </p:sp>
+      <p:cxnSp>
+        <p:nvCxnSpPr>
+          <p:cNvPr id="200" name="c200"/>
+          <p:cNvCxnSpPr/>
+          <p:nvPr/>
+        </p:nvCxnSpPr>
+        <p:spPr>
+          <a:xfrm>
+            <a:off x="3111500" y="1803400"/>
+            <a:ext cx="0" cy="177800"/>
+          </a:xfrm>
+          <a:prstGeom prst="straightConnector1">
+            <a:avLst/>
+          </a:prstGeom>
+          <a:ln w="19050" cap="rnd">
+            <a:solidFill>
+              <a:srgbClr val="64748B"/>
+            </a:solidFill>
+            <a:tailEnd type="triangle" w="med" len="med"/>
+          </a:ln>
+        </p:spPr>
+        <p:style>
+          <a:lnRef idx="1">
+            <a:scrgbClr r="0" g="0" b="0"/>
+          </a:lnRef>
+          <a:fillRef idx="0">
+            <a:scrgbClr r="0" g="0" b="0"/>
+          </a:fillRef>
+          <a:effectRef idx="0">
+            <a:scrgbClr r="0" g="0" b="0"/>
+          </a:effectRef>
+          <a:fontRef idx="minor"/>
+        </p:style>
+      </p:cxnSp>
+      <p:cxnSp>
+        <p:nvCxnSpPr>
+          <p:cNvPr id="203" name="c203"/>
+          <p:cNvCxnSpPr/>
+          <p:nvPr/>
+        </p:nvCxnSpPr>
+        <p:spPr>
+          <a:xfrm flipH="1">
+            <a:off x="2857500" y="3759200"/>
+            <a:ext cx="190500" cy="330200"/>
+          </a:xfrm>
+          <a:prstGeom prst="straightConnector1">
+            <a:avLst/>
+          </a:prstGeom>
+          <a:ln w="19050" cap="rnd">
+            <a:solidFill>
+              <a:srgbClr val="64748B"/>
+            </a:solidFill>
+            <a:tailEnd type="triangle" w="med" len="med"/>
+          </a:ln>
+        </p:spPr>
+        <p:style>
+          <a:lnRef idx="1">
+            <a:scrgbClr r="0" g="0" b="0"/>
+          </a:lnRef>
+          <a:fillRef idx="0">
+            <a:scrgbClr r="0" g="0" b="0"/>
+          </a:fillRef>
+          <a:effectRef idx="0">
+            <a:scrgbClr r="0" g="0" b="0"/>
+          </a:effectRef>
+          <a:fontRef idx="minor"/>
+        </p:style>
+      </p:cxnSp>
+      <p:cxnSp>
+        <p:nvCxnSpPr>
+          <p:cNvPr id="204" name="c204"/>
+          <p:cNvCxnSpPr/>
+          <p:nvPr/>
+        </p:nvCxnSpPr>
+        <p:spPr>
+          <a:xfrm flipH="1">
+            <a:off x="3619500" y="3759200"/>
+            <a:ext cx="2603500" cy="330200"/>
+          </a:xfrm>
+          <a:prstGeom prst="straightConnector1">
+            <a:avLst/>
+          </a:prstGeom>
+          <a:ln w="19050" cap="rnd">
+            <a:solidFill>
+              <a:srgbClr val="64748B"/>
+            </a:solidFill>
+            <a:tailEnd type="triangle" w="med" len="med"/>
+          </a:ln>
+        </p:spPr>
+        <p:style>
+          <a:lnRef idx="1">
+            <a:scrgbClr r="0" g="0" b="0"/>
+          </a:lnRef>
+          <a:fillRef idx="0">
+            <a:scrgbClr r="0" g="0" b="0"/>
+          </a:fillRef>
+          <a:effectRef idx="0">
+            <a:scrgbClr r="0" g="0" b="0"/>
+          </a:effectRef>
+          <a:fontRef idx="minor"/>
+        </p:style>
+      </p:cxnSp>
+      <p:cxnSp>
+        <p:nvCxnSpPr>
+          <p:cNvPr id="205" name="c205"/>
+          <p:cNvCxnSpPr/>
+          <p:nvPr/>
+        </p:nvCxnSpPr>
+        <p:spPr>
+          <a:xfrm>
+            <a:off x="3111500" y="4673600"/>
+            <a:ext cx="0" cy="177800"/>
+          </a:xfrm>
+          <a:prstGeom prst="straightConnector1">
+            <a:avLst/>
+          </a:prstGeom>
+          <a:ln w="19050" cap="rnd">
+            <a:solidFill>
+              <a:srgbClr val="64748B"/>
+            </a:solidFill>
+            <a:tailEnd type="triangle" w="med" len="med"/>
+          </a:ln>
+        </p:spPr>
+        <p:style>
+          <a:lnRef idx="1">
+            <a:scrgbClr r="0" g="0" b="0"/>
+          </a:lnRef>
+          <a:fillRef idx="0">
+            <a:scrgbClr r="0" g="0" b="0"/>
+          </a:fillRef>
+          <a:effectRef idx="0">
+            <a:scrgbClr r="0" g="0" b="0"/>
+          </a:effectRef>
+          <a:fontRef idx="minor"/>
+        </p:style>
+      </p:cxnSp>
+      <p:cxnSp>
+        <p:nvCxnSpPr>
+          <p:cNvPr id="206" name="c206"/>
+          <p:cNvCxnSpPr/>
+          <p:nvPr/>
+        </p:nvCxnSpPr>
+        <p:spPr>
+          <a:xfrm flipH="1">
+            <a:off x="2438400" y="5384800"/>
+            <a:ext cx="165100" cy="203200"/>
+          </a:xfrm>
+          <a:prstGeom prst="straightConnector1">
+            <a:avLst/>
+          </a:prstGeom>
+          <a:ln w="19050" cap="rnd">
+            <a:solidFill>
+              <a:srgbClr val="64748B"/>
+            </a:solidFill>
+            <a:tailEnd type="triangle" w="med" len="med"/>
+          </a:ln>
+        </p:spPr>
+        <p:style>
+          <a:lnRef idx="1">
+            <a:scrgbClr r="0" g="0" b="0"/>
+          </a:lnRef>
+          <a:fillRef idx="0">
+            <a:scrgbClr r="0" g="0" b="0"/>
+          </a:fillRef>
+          <a:effectRef idx="0">
+            <a:scrgbClr r="0" g="0" b="0"/>
+          </a:effectRef>
+          <a:fontRef idx="minor"/>
+        </p:style>
+      </p:cxnSp>
+      <p:cxnSp>
+        <p:nvCxnSpPr>
+          <p:cNvPr id="207" name="c207"/>
+          <p:cNvCxnSpPr/>
+          <p:nvPr/>
+        </p:nvCxnSpPr>
+        <p:spPr>
+          <a:xfrm>
+            <a:off x="3810000" y="5384800"/>
+            <a:ext cx="1905000" cy="203200"/>
+          </a:xfrm>
+          <a:prstGeom prst="straightConnector1">
+            <a:avLst/>
+          </a:prstGeom>
+          <a:ln w="19050" cap="rnd">
+            <a:solidFill>
+              <a:srgbClr val="64748B"/>
+            </a:solidFill>
+            <a:tailEnd type="triangle" w="med" len="med"/>
+          </a:ln>
+        </p:spPr>
+        <p:style>
+          <a:lnRef idx="1">
+            <a:scrgbClr r="0" g="0" b="0"/>
+          </a:lnRef>
+          <a:fillRef idx="0">
+            <a:scrgbClr r="0" g="0" b="0"/>
+          </a:fillRef>
+          <a:effectRef idx="0">
+            <a:scrgbClr r="0" g="0" b="0"/>
+          </a:effectRef>
+          <a:fontRef idx="minor"/>
+        </p:style>
+      </p:cxnSp>
+      <p:cxnSp>
+        <p:nvCxnSpPr>
+          <p:cNvPr id="208" name="c208"/>
+          <p:cNvCxnSpPr/>
+          <p:nvPr/>
+        </p:nvCxnSpPr>
+        <p:spPr>
+          <a:xfrm>
+            <a:off x="4318000" y="3759200"/>
+            <a:ext cx="4724400" cy="1981200"/>
+          </a:xfrm>
+          <a:prstGeom prst="straightConnector1">
+            <a:avLst/>
+          </a:prstGeom>
+          <a:ln w="12700" cap="rnd">
+            <a:solidFill>
+              <a:srgbClr val="94A3B8"/>
+            </a:solidFill>
+            <a:prstDash val="dash"/>
+            <a:tailEnd type="triangle" w="med" len="med"/>
+          </a:ln>
+        </p:spPr>
+        <p:style>
+          <a:lnRef idx="1">
+            <a:scrgbClr r="0" g="0" b="0"/>
+          </a:lnRef>
+          <a:fillRef idx="0">
+            <a:scrgbClr r="0" g="0" b="0"/>
+          </a:fillRef>
+          <a:effectRef idx="0">
+            <a:scrgbClr r="0" g="0" b="0"/>
+          </a:effectRef>
+          <a:fontRef idx="minor"/>
+        </p:style>
+      </p:cxnSp>
+      <p:cxnSp>
+        <p:nvCxnSpPr>
+          <p:cNvPr id="209" name="c209"/>
+          <p:cNvCxnSpPr/>
+          <p:nvPr/>
+        </p:nvCxnSpPr>
+        <p:spPr>
+          <a:xfrm>
+            <a:off x="7112000" y="3810000"/>
+            <a:ext cx="2311400" cy="1803400"/>
+          </a:xfrm>
+          <a:prstGeom prst="straightConnector1">
+            <a:avLst/>
+          </a:prstGeom>
+          <a:ln w="12700" cap="rnd">
+            <a:solidFill>
+              <a:srgbClr val="94A3B8"/>
+            </a:solidFill>
+            <a:prstDash val="dash"/>
+            <a:tailEnd type="triangle" w="med" len="med"/>
+          </a:ln>
+        </p:spPr>
+        <p:style>
+          <a:lnRef idx="1">
+            <a:scrgbClr r="0" g="0" b="0"/>
+          </a:lnRef>
+          <a:fillRef idx="0">
+            <a:scrgbClr r="0" g="0" b="0"/>
+          </a:fillRef>
+          <a:effectRef idx="0">
+            <a:scrgbClr r="0" g="0" b="0"/>
+          </a:effectRef>
+          <a:fontRef idx="minor"/>
+        </p:style>
+      </p:cxnSp>
+      <p:cxnSp>
+        <p:nvCxnSpPr>
+          <p:cNvPr id="210" name="c210"/>
+          <p:cNvCxnSpPr/>
+          <p:nvPr/>
+        </p:nvCxnSpPr>
+        <p:spPr>
+          <a:xfrm>
+            <a:off x="7747000" y="5943600"/>
+            <a:ext cx="1143000" cy="0"/>
+          </a:xfrm>
+          <a:prstGeom prst="straightConnector1">
+            <a:avLst/>
+          </a:prstGeom>
+          <a:ln w="12700" cap="rnd">
+            <a:solidFill>
+              <a:srgbClr val="94A3B8"/>
+            </a:solidFill>
+            <a:prstDash val="dash"/>
+            <a:tailEnd type="triangle" w="med" len="med"/>
+          </a:ln>
+        </p:spPr>
+        <p:style>
+          <a:lnRef idx="1">
+            <a:scrgbClr r="0" g="0" b="0"/>
+          </a:lnRef>
+          <a:fillRef idx="0">
+            <a:scrgbClr r="0" g="0" b="0"/>
+          </a:fillRef>
+          <a:effectRef idx="0">
+            <a:scrgbClr r="0" g="0" b="0"/>
+          </a:effectRef>
+          <a:fontRef idx="minor"/>
+        </p:style>
+      </p:cxnSp>
+      <p:sp>
+        <p:nvSpPr>
+          <p:cNvPr id="211" name="lbl211"/>
+          <p:cNvSpPr txBox="1"/>
+          <p:nvPr/>
+        </p:nvSpPr>
+        <p:spPr>
+          <a:xfrm>
+            <a:off x="5969000" y="4470400"/>
+            <a:ext cx="762000" cy="254000"/>
           </a:xfrm>
           <a:prstGeom prst="rect">
             <a:avLst/>
           </a:prstGeom>
-          <a:noFill/>
-          <a:ln/>
-        </p:spPr>
-        <p:txBody>
-          <a:bodyPr wrap="square" lIns="0" tIns="0" rIns="0" bIns="0" rtlCol="0" anchor="ctr"/>
-          <a:lstStyle/>
-          <a:p>
-            <a:pPr marL="0" indent="0">
-              <a:buNone/>
-            </a:pPr>
-            <a:r>
-              <a:rPr lang="en-US" sz="1600" b="1" kern="0" spc="300" dirty="0">
-                <a:solidFill>
-                  <a:srgbClr val="BFDBFE"/>
-                </a:solidFill>
-                <a:latin typeface="Calibri" pitchFamily="34" charset="0"/>
-                <a:ea typeface="Calibri" pitchFamily="34" charset="-122"/>
-                <a:cs typeface="Calibri" pitchFamily="34" charset="-120"/>
-              </a:rPr>
-              <a:t>LIVE DEMO</a:t>
-            </a:r>
-            <a:endParaRPr lang="en-US" sz="1600" dirty="0"/>
-          </a:p>
-        </p:txBody>
-      </p:sp>
-      <p:sp>
-        <p:nvSpPr>
-          <p:cNvPr id="4" name="Text 2"/>
-          <p:cNvSpPr/>
-          <p:nvPr/>
-        </p:nvSpPr>
-        <p:spPr>
-          <a:xfrm>
-            <a:off x="777240" y="1371600"/>
-            <a:ext cx="10515600" cy="914400"/>
+          <a:solidFill>
+            <a:srgbClr val="FFFFFF"/>
+          </a:solidFill>
+        </p:spPr>
+        <p:txBody>
+          <a:bodyPr wrap="none" lIns="18000" tIns="9000" rIns="18000" bIns="9000" anchor="ctr"/>
+          <a:lstStyle/>
+          <a:p>
+            <a:pPr algn="ctr"/>
+            <a:r>
+              <a:rPr lang="en-US" sz="1000" b="0" i="1" dirty="0">
+                <a:solidFill>
+                  <a:srgbClr val="475569"/>
+                </a:solidFill>
+                <a:latin typeface="Calibri"/>
+              </a:rPr>
+              <a:t>reads</a:t>
+            </a:r>
+          </a:p>
+        </p:txBody>
+      </p:sp>
+      <p:sp>
+        <p:nvSpPr>
+          <p:cNvPr id="212" name="lbl212"/>
+          <p:cNvSpPr txBox="1"/>
+          <p:nvPr/>
+        </p:nvSpPr>
+        <p:spPr>
+          <a:xfrm>
+            <a:off x="8255000" y="4572000"/>
+            <a:ext cx="762000" cy="254000"/>
           </a:xfrm>
           <a:prstGeom prst="rect">
             <a:avLst/>
           </a:prstGeom>
-          <a:noFill/>
-          <a:ln/>
-        </p:spPr>
-        <p:txBody>
-          <a:bodyPr wrap="square" lIns="0" tIns="0" rIns="0" bIns="0" rtlCol="0" anchor="ctr"/>
-          <a:lstStyle/>
-          <a:p>
-            <a:pPr marL="0" indent="0">
-              <a:buNone/>
-            </a:pPr>
-            <a:r>
-              <a:rPr lang="en-US" sz="5000" b="1" dirty="0">
-                <a:solidFill>
-                  <a:srgbClr val="FFFFFF"/>
-                </a:solidFill>
-                <a:latin typeface="Cambria" pitchFamily="34" charset="0"/>
-                <a:ea typeface="Cambria" pitchFamily="34" charset="-122"/>
-                <a:cs typeface="Cambria" pitchFamily="34" charset="-120"/>
-              </a:rPr>
-              <a:t>See it working</a:t>
-            </a:r>
-            <a:endParaRPr lang="en-US" sz="5000" dirty="0"/>
-          </a:p>
-        </p:txBody>
-      </p:sp>
-      <p:sp>
-        <p:nvSpPr>
-          <p:cNvPr id="5" name="Shape 3"/>
-          <p:cNvSpPr/>
-          <p:nvPr/>
-        </p:nvSpPr>
-        <p:spPr>
-          <a:xfrm>
-            <a:off x="868680" y="2697480"/>
-            <a:ext cx="502920" cy="502920"/>
-          </a:xfrm>
-          <a:prstGeom prst="ellipse">
-            <a:avLst/>
-          </a:prstGeom>
           <a:solidFill>
-            <a:srgbClr val="FF9900"/>
+            <a:srgbClr val="FFFFFF"/>
           </a:solidFill>
-          <a:ln/>
-        </p:spPr>
-        <p:txBody>
-          <a:bodyPr/>
-          <a:lstStyle/>
-          <a:p>
-            <a:endParaRPr lang="en-CA"/>
-          </a:p>
-        </p:txBody>
-      </p:sp>
-      <p:sp>
-        <p:nvSpPr>
-          <p:cNvPr id="6" name="Text 4"/>
-          <p:cNvSpPr/>
-          <p:nvPr/>
-        </p:nvSpPr>
-        <p:spPr>
-          <a:xfrm>
-            <a:off x="868680" y="2697480"/>
-            <a:ext cx="502920" cy="502920"/>
+        </p:spPr>
+        <p:txBody>
+          <a:bodyPr wrap="none" lIns="18000" tIns="9000" rIns="18000" bIns="9000" anchor="ctr"/>
+          <a:lstStyle/>
+          <a:p>
+            <a:pPr algn="ctr"/>
+            <a:r>
+              <a:rPr lang="en-US" sz="1000" b="0" i="1" dirty="0">
+                <a:solidFill>
+                  <a:srgbClr val="475569"/>
+                </a:solidFill>
+                <a:latin typeface="Calibri"/>
+              </a:rPr>
+              <a:t>reads</a:t>
+            </a:r>
+          </a:p>
+        </p:txBody>
+      </p:sp>
+      <p:sp>
+        <p:nvSpPr>
+          <p:cNvPr id="213" name="lbl213"/>
+          <p:cNvSpPr txBox="1"/>
+          <p:nvPr/>
+        </p:nvSpPr>
+        <p:spPr>
+          <a:xfrm>
+            <a:off x="7975600" y="5740400"/>
+            <a:ext cx="812800" cy="254000"/>
           </a:xfrm>
           <a:prstGeom prst="rect">
             <a:avLst/>
           </a:prstGeom>
-          <a:noFill/>
-          <a:ln/>
-        </p:spPr>
-        <p:txBody>
-          <a:bodyPr wrap="square" lIns="0" tIns="0" rIns="0" bIns="0" rtlCol="0" anchor="ctr"/>
-          <a:lstStyle/>
-          <a:p>
-            <a:pPr marL="0" indent="0" algn="ctr">
-              <a:buNone/>
-            </a:pPr>
-            <a:r>
-              <a:rPr lang="en-US" sz="1800" b="1" dirty="0">
-                <a:solidFill>
-                  <a:srgbClr val="232F3E"/>
-                </a:solidFill>
-                <a:latin typeface="Calibri" pitchFamily="34" charset="0"/>
-                <a:ea typeface="Calibri" pitchFamily="34" charset="-122"/>
-                <a:cs typeface="Calibri" pitchFamily="34" charset="-120"/>
-              </a:rPr>
-              <a:t>1</a:t>
-            </a:r>
-            <a:endParaRPr lang="en-US" sz="1800" dirty="0"/>
-          </a:p>
-        </p:txBody>
-      </p:sp>
-      <p:sp>
-        <p:nvSpPr>
-          <p:cNvPr id="7" name="Text 5"/>
-          <p:cNvSpPr/>
-          <p:nvPr/>
-        </p:nvSpPr>
-        <p:spPr>
-          <a:xfrm>
-            <a:off x="1600200" y="2660904"/>
-            <a:ext cx="9784080" cy="566928"/>
-          </a:xfrm>
-          <a:prstGeom prst="rect">
-            <a:avLst/>
-          </a:prstGeom>
-          <a:noFill/>
-          <a:ln/>
-        </p:spPr>
-        <p:txBody>
-          <a:bodyPr wrap="square" lIns="0" tIns="0" rIns="0" bIns="0" rtlCol="0" anchor="ctr"/>
-          <a:lstStyle/>
-          <a:p>
-            <a:pPr marL="0" indent="0">
-              <a:buNone/>
-            </a:pPr>
-            <a:r>
-              <a:rPr lang="en-US" sz="1600" b="1" dirty="0">
-                <a:solidFill>
-                  <a:srgbClr val="FFFFFF"/>
-                </a:solidFill>
-                <a:latin typeface="Calibri" pitchFamily="34" charset="0"/>
-                <a:ea typeface="Calibri" pitchFamily="34" charset="-122"/>
-                <a:cs typeface="Calibri" pitchFamily="34" charset="-120"/>
-              </a:rPr>
-              <a:t>Teacher   </a:t>
-            </a:r>
-            <a:r>
-              <a:rPr lang="en-US" sz="1600" dirty="0">
-                <a:solidFill>
-                  <a:srgbClr val="C9D7F5"/>
-                </a:solidFill>
-                <a:latin typeface="Calibri" pitchFamily="34" charset="0"/>
-                <a:ea typeface="Calibri" pitchFamily="34" charset="-122"/>
-                <a:cs typeface="Calibri" pitchFamily="34" charset="-120"/>
-              </a:rPr>
-              <a:t>Create a course + join code, upload material — it's chunked &amp; embedded into Aurora/pgvector.</a:t>
-            </a:r>
-            <a:endParaRPr lang="en-US" sz="1600" dirty="0"/>
-          </a:p>
-        </p:txBody>
-      </p:sp>
-      <p:sp>
-        <p:nvSpPr>
-          <p:cNvPr id="8" name="Shape 6"/>
-          <p:cNvSpPr/>
-          <p:nvPr/>
-        </p:nvSpPr>
-        <p:spPr>
-          <a:xfrm>
-            <a:off x="868680" y="3538728"/>
-            <a:ext cx="502920" cy="502920"/>
-          </a:xfrm>
-          <a:prstGeom prst="ellipse">
-            <a:avLst/>
-          </a:prstGeom>
           <a:solidFill>
-            <a:srgbClr val="FF9900"/>
+            <a:srgbClr val="FFFFFF"/>
           </a:solidFill>
-          <a:ln/>
-        </p:spPr>
-        <p:txBody>
-          <a:bodyPr/>
-          <a:lstStyle/>
-          <a:p>
-            <a:endParaRPr lang="en-CA"/>
-          </a:p>
-        </p:txBody>
-      </p:sp>
-      <p:sp>
-        <p:nvSpPr>
-          <p:cNvPr id="9" name="Text 7"/>
-          <p:cNvSpPr/>
-          <p:nvPr/>
-        </p:nvSpPr>
-        <p:spPr>
-          <a:xfrm>
-            <a:off x="868680" y="3538728"/>
-            <a:ext cx="502920" cy="502920"/>
-          </a:xfrm>
-          <a:prstGeom prst="rect">
-            <a:avLst/>
-          </a:prstGeom>
-          <a:noFill/>
-          <a:ln/>
-        </p:spPr>
-        <p:txBody>
-          <a:bodyPr wrap="square" lIns="0" tIns="0" rIns="0" bIns="0" rtlCol="0" anchor="ctr"/>
-          <a:lstStyle/>
-          <a:p>
-            <a:pPr marL="0" indent="0" algn="ctr">
-              <a:buNone/>
-            </a:pPr>
-            <a:r>
-              <a:rPr lang="en-US" sz="1800" b="1" dirty="0">
-                <a:solidFill>
-                  <a:srgbClr val="232F3E"/>
-                </a:solidFill>
-                <a:latin typeface="Calibri" pitchFamily="34" charset="0"/>
-                <a:ea typeface="Calibri" pitchFamily="34" charset="-122"/>
-                <a:cs typeface="Calibri" pitchFamily="34" charset="-120"/>
-              </a:rPr>
-              <a:t>2</a:t>
-            </a:r>
-            <a:endParaRPr lang="en-US" sz="1800" dirty="0"/>
-          </a:p>
-        </p:txBody>
-      </p:sp>
-      <p:sp>
-        <p:nvSpPr>
-          <p:cNvPr id="10" name="Text 8"/>
-          <p:cNvSpPr/>
-          <p:nvPr/>
-        </p:nvSpPr>
-        <p:spPr>
-          <a:xfrm>
-            <a:off x="1600200" y="3502152"/>
-            <a:ext cx="9784080" cy="566928"/>
-          </a:xfrm>
-          <a:prstGeom prst="rect">
-            <a:avLst/>
-          </a:prstGeom>
-          <a:noFill/>
-          <a:ln/>
-        </p:spPr>
-        <p:txBody>
-          <a:bodyPr wrap="square" lIns="0" tIns="0" rIns="0" bIns="0" rtlCol="0" anchor="ctr"/>
-          <a:lstStyle/>
-          <a:p>
-            <a:pPr marL="0" indent="0">
-              <a:buNone/>
-            </a:pPr>
-            <a:r>
-              <a:rPr lang="en-US" sz="1600" b="1" dirty="0">
-                <a:solidFill>
-                  <a:srgbClr val="FFFFFF"/>
-                </a:solidFill>
-                <a:latin typeface="Calibri" pitchFamily="34" charset="0"/>
-                <a:ea typeface="Calibri" pitchFamily="34" charset="-122"/>
-                <a:cs typeface="Calibri" pitchFamily="34" charset="-120"/>
-              </a:rPr>
-              <a:t>Diagnose   </a:t>
-            </a:r>
-            <a:r>
-              <a:rPr lang="en-US" sz="1600" dirty="0">
-                <a:solidFill>
-                  <a:srgbClr val="C9D7F5"/>
-                </a:solidFill>
-                <a:latin typeface="Calibri" pitchFamily="34" charset="0"/>
-                <a:ea typeface="Calibri" pitchFamily="34" charset="-122"/>
-                <a:cs typeface="Calibri" pitchFamily="34" charset="-120"/>
-              </a:rPr>
-              <a:t>Student joins by code; an AI diagnostic seeds their strengths &amp; gaps map.</a:t>
-            </a:r>
-            <a:endParaRPr lang="en-US" sz="1600" dirty="0"/>
-          </a:p>
-        </p:txBody>
-      </p:sp>
-      <p:sp>
-        <p:nvSpPr>
-          <p:cNvPr id="11" name="Shape 9"/>
-          <p:cNvSpPr/>
-          <p:nvPr/>
-        </p:nvSpPr>
-        <p:spPr>
-          <a:xfrm>
-            <a:off x="868680" y="4379976"/>
-            <a:ext cx="502920" cy="502920"/>
-          </a:xfrm>
-          <a:prstGeom prst="ellipse">
-            <a:avLst/>
-          </a:prstGeom>
-          <a:solidFill>
-            <a:srgbClr val="FF9900"/>
-          </a:solidFill>
-          <a:ln/>
-        </p:spPr>
-        <p:txBody>
-          <a:bodyPr/>
-          <a:lstStyle/>
-          <a:p>
-            <a:endParaRPr lang="en-CA"/>
-          </a:p>
-        </p:txBody>
-      </p:sp>
-      <p:sp>
-        <p:nvSpPr>
-          <p:cNvPr id="12" name="Text 10"/>
-          <p:cNvSpPr/>
-          <p:nvPr/>
-        </p:nvSpPr>
-        <p:spPr>
-          <a:xfrm>
-            <a:off x="868680" y="4379976"/>
-            <a:ext cx="502920" cy="502920"/>
-          </a:xfrm>
-          <a:prstGeom prst="rect">
-            <a:avLst/>
-          </a:prstGeom>
-          <a:noFill/>
-          <a:ln/>
-        </p:spPr>
-        <p:txBody>
-          <a:bodyPr wrap="square" lIns="0" tIns="0" rIns="0" bIns="0" rtlCol="0" anchor="ctr"/>
-          <a:lstStyle/>
-          <a:p>
-            <a:pPr marL="0" indent="0" algn="ctr">
-              <a:buNone/>
-            </a:pPr>
-            <a:r>
-              <a:rPr lang="en-US" sz="1800" b="1" dirty="0">
-                <a:solidFill>
-                  <a:srgbClr val="232F3E"/>
-                </a:solidFill>
-                <a:latin typeface="Calibri" pitchFamily="34" charset="0"/>
-                <a:ea typeface="Calibri" pitchFamily="34" charset="-122"/>
-                <a:cs typeface="Calibri" pitchFamily="34" charset="-120"/>
-              </a:rPr>
-              <a:t>3</a:t>
-            </a:r>
-            <a:endParaRPr lang="en-US" sz="1800" dirty="0"/>
-          </a:p>
-        </p:txBody>
-      </p:sp>
-      <p:sp>
-        <p:nvSpPr>
-          <p:cNvPr id="13" name="Text 11"/>
-          <p:cNvSpPr/>
-          <p:nvPr/>
-        </p:nvSpPr>
-        <p:spPr>
-          <a:xfrm>
-            <a:off x="1600200" y="4343400"/>
-            <a:ext cx="9784080" cy="566928"/>
-          </a:xfrm>
-          <a:prstGeom prst="rect">
-            <a:avLst/>
-          </a:prstGeom>
-          <a:noFill/>
-          <a:ln/>
-        </p:spPr>
-        <p:txBody>
-          <a:bodyPr wrap="square" lIns="0" tIns="0" rIns="0" bIns="0" rtlCol="0" anchor="ctr"/>
-          <a:lstStyle/>
-          <a:p>
-            <a:pPr marL="0" indent="0">
-              <a:buNone/>
-            </a:pPr>
-            <a:r>
-              <a:rPr lang="en-US" sz="1600" b="1" dirty="0">
-                <a:solidFill>
-                  <a:srgbClr val="FFFFFF"/>
-                </a:solidFill>
-                <a:latin typeface="Calibri" pitchFamily="34" charset="0"/>
-                <a:ea typeface="Calibri" pitchFamily="34" charset="-122"/>
-                <a:cs typeface="Calibri" pitchFamily="34" charset="-120"/>
-              </a:rPr>
-              <a:t>Teach + Check   </a:t>
-            </a:r>
-            <a:r>
-              <a:rPr lang="en-US" sz="1600" dirty="0">
-                <a:solidFill>
-                  <a:srgbClr val="C9D7F5"/>
-                </a:solidFill>
-                <a:latin typeface="Calibri" pitchFamily="34" charset="0"/>
-                <a:ea typeface="Calibri" pitchFamily="34" charset="-122"/>
-                <a:cs typeface="Calibri" pitchFamily="34" charset="-120"/>
-              </a:rPr>
-              <a:t>The grounded tutor streams answers from the student's own material and checks understanding live.</a:t>
-            </a:r>
-            <a:endParaRPr lang="en-US" sz="1600" dirty="0"/>
-          </a:p>
-        </p:txBody>
-      </p:sp>
-      <p:sp>
-        <p:nvSpPr>
-          <p:cNvPr id="14" name="Shape 12"/>
-          <p:cNvSpPr/>
-          <p:nvPr/>
-        </p:nvSpPr>
-        <p:spPr>
-          <a:xfrm>
-            <a:off x="868680" y="5221224"/>
-            <a:ext cx="502920" cy="502920"/>
-          </a:xfrm>
-          <a:prstGeom prst="ellipse">
-            <a:avLst/>
-          </a:prstGeom>
-          <a:solidFill>
-            <a:srgbClr val="FF9900"/>
-          </a:solidFill>
-          <a:ln/>
-        </p:spPr>
-        <p:txBody>
-          <a:bodyPr/>
-          <a:lstStyle/>
-          <a:p>
-            <a:endParaRPr lang="en-CA"/>
-          </a:p>
-        </p:txBody>
-      </p:sp>
-      <p:sp>
-        <p:nvSpPr>
-          <p:cNvPr id="15" name="Text 13"/>
-          <p:cNvSpPr/>
-          <p:nvPr/>
-        </p:nvSpPr>
-        <p:spPr>
-          <a:xfrm>
-            <a:off x="868680" y="5221224"/>
-            <a:ext cx="502920" cy="502920"/>
-          </a:xfrm>
-          <a:prstGeom prst="rect">
-            <a:avLst/>
-          </a:prstGeom>
-          <a:noFill/>
-          <a:ln/>
-        </p:spPr>
-        <p:txBody>
-          <a:bodyPr wrap="square" lIns="0" tIns="0" rIns="0" bIns="0" rtlCol="0" anchor="ctr"/>
-          <a:lstStyle/>
-          <a:p>
-            <a:pPr marL="0" indent="0" algn="ctr">
-              <a:buNone/>
-            </a:pPr>
-            <a:r>
-              <a:rPr lang="en-US" sz="1800" b="1" dirty="0">
-                <a:solidFill>
-                  <a:srgbClr val="232F3E"/>
-                </a:solidFill>
-                <a:latin typeface="Calibri" pitchFamily="34" charset="0"/>
-                <a:ea typeface="Calibri" pitchFamily="34" charset="-122"/>
-                <a:cs typeface="Calibri" pitchFamily="34" charset="-120"/>
-              </a:rPr>
-              <a:t>4</a:t>
-            </a:r>
-            <a:endParaRPr lang="en-US" sz="1800" dirty="0"/>
-          </a:p>
-        </p:txBody>
-      </p:sp>
-      <p:sp>
-        <p:nvSpPr>
-          <p:cNvPr id="16" name="Text 14"/>
-          <p:cNvSpPr/>
-          <p:nvPr/>
-        </p:nvSpPr>
-        <p:spPr>
-          <a:xfrm>
-            <a:off x="1600200" y="5184648"/>
-            <a:ext cx="9784080" cy="566928"/>
-          </a:xfrm>
-          <a:prstGeom prst="rect">
-            <a:avLst/>
-          </a:prstGeom>
-          <a:noFill/>
-          <a:ln/>
-        </p:spPr>
-        <p:txBody>
-          <a:bodyPr wrap="square" lIns="0" tIns="0" rIns="0" bIns="0" rtlCol="0" anchor="ctr"/>
-          <a:lstStyle/>
-          <a:p>
-            <a:pPr marL="0" indent="0">
-              <a:buNone/>
-            </a:pPr>
-            <a:r>
-              <a:rPr lang="en-US" sz="1600" b="1" dirty="0">
-                <a:solidFill>
-                  <a:srgbClr val="FFFFFF"/>
-                </a:solidFill>
-                <a:latin typeface="Calibri" pitchFamily="34" charset="0"/>
-                <a:ea typeface="Calibri" pitchFamily="34" charset="-122"/>
-                <a:cs typeface="Calibri" pitchFamily="34" charset="-120"/>
-              </a:rPr>
-              <a:t>Verify   </a:t>
-            </a:r>
-            <a:r>
-              <a:rPr lang="en-US" sz="1600" dirty="0">
-                <a:solidFill>
-                  <a:srgbClr val="C9D7F5"/>
-                </a:solidFill>
-                <a:latin typeface="Calibri" pitchFamily="34" charset="0"/>
-                <a:ea typeface="Calibri" pitchFamily="34" charset="-122"/>
-                <a:cs typeface="Calibri" pitchFamily="34" charset="-120"/>
-              </a:rPr>
-              <a:t>A graded assessment updates the knowledge map — and the teacher's cohort analytics.</a:t>
-            </a:r>
-            <a:endParaRPr lang="en-US" sz="1600" dirty="0"/>
-          </a:p>
-        </p:txBody>
-      </p:sp>
-      <p:pic>
-        <p:nvPicPr>
-          <p:cNvPr id="17" name="Image 0" descr="EdSynapse logo"/>
-          <p:cNvPicPr>
-            <a:picLocks noChangeAspect="1"/>
-          </p:cNvPicPr>
-          <p:nvPr/>
-        </p:nvPicPr>
-        <p:blipFill>
-          <a:blip r:embed="rId3"/>
-          <a:stretch>
-            <a:fillRect/>
-          </a:stretch>
-        </p:blipFill>
-        <p:spPr>
-          <a:xfrm>
-            <a:off x="11265408" y="292608"/>
-            <a:ext cx="640080" cy="640080"/>
-          </a:xfrm>
-          <a:prstGeom prst="rect">
-            <a:avLst/>
-          </a:prstGeom>
-        </p:spPr>
-      </p:pic>
+        </p:spPr>
+        <p:txBody>
+          <a:bodyPr wrap="none" lIns="18000" tIns="9000" rIns="18000" bIns="9000" anchor="ctr"/>
+          <a:lstStyle/>
+          <a:p>
+            <a:pPr algn="ctr"/>
+            <a:r>
+              <a:rPr lang="en-US" sz="1000" b="0" i="1" dirty="0">
+                <a:solidFill>
+                  <a:srgbClr val="475569"/>
+                </a:solidFill>
+                <a:latin typeface="Calibri"/>
+              </a:rPr>
+              <a:t>writes</a:t>
+            </a:r>
+          </a:p>
+        </p:txBody>
+      </p:sp>
+      <p:cxnSp>
+        <p:nvCxnSpPr>
+          <p:cNvPr id="300" name="c300"/>
+          <p:cNvCxnSpPr/>
+          <p:nvPr/>
+        </p:nvCxnSpPr>
+        <p:spPr>
+          <a:xfrm>
+            <a:off x="3962400" y="2578100"/>
+            <a:ext cx="330200" cy="406400"/>
+          </a:xfrm>
+          <a:prstGeom prst="straightConnector1">
+            <a:avLst/>
+          </a:prstGeom>
+          <a:ln w="19050" cap="rnd">
+            <a:solidFill>
+              <a:srgbClr val="64748B"/>
+            </a:solidFill>
+            <a:tailEnd type="triangle" w="med" len="med"/>
+          </a:ln>
+        </p:spPr>
+        <p:style>
+          <a:lnRef idx="1">
+            <a:scrgbClr r="0" g="0" b="0"/>
+          </a:lnRef>
+          <a:fillRef idx="0">
+            <a:scrgbClr r="0" g="0" b="0"/>
+          </a:fillRef>
+          <a:effectRef idx="0">
+            <a:scrgbClr r="0" g="0" b="0"/>
+          </a:effectRef>
+          <a:fontRef idx="minor"/>
+        </p:style>
+      </p:cxnSp>
+      <p:cxnSp>
+        <p:nvCxnSpPr>
+          <p:cNvPr id="301" name="c301"/>
+          <p:cNvCxnSpPr/>
+          <p:nvPr/>
+        </p:nvCxnSpPr>
+        <p:spPr>
+          <a:xfrm>
+            <a:off x="4470400" y="2578100"/>
+            <a:ext cx="1549400" cy="406400"/>
+          </a:xfrm>
+          <a:prstGeom prst="straightConnector1">
+            <a:avLst/>
+          </a:prstGeom>
+          <a:ln w="19050" cap="rnd">
+            <a:solidFill>
+              <a:srgbClr val="64748B"/>
+            </a:solidFill>
+            <a:tailEnd type="triangle" w="med" len="med"/>
+          </a:ln>
+        </p:spPr>
+        <p:style>
+          <a:lnRef idx="1">
+            <a:scrgbClr r="0" g="0" b="0"/>
+          </a:lnRef>
+          <a:fillRef idx="0">
+            <a:scrgbClr r="0" g="0" b="0"/>
+          </a:fillRef>
+          <a:effectRef idx="0">
+            <a:scrgbClr r="0" g="0" b="0"/>
+          </a:effectRef>
+          <a:fontRef idx="minor"/>
+        </p:style>
+      </p:cxnSp>
     </p:spTree>
+    <p:extLst>
+      <p:ext uri="{BB962C8B-B14F-4D97-AF65-F5344CB8AC3E}">
+        <p14:creationId xmlns:p14="http://schemas.microsoft.com/office/powerpoint/2010/main" val="897003824"/>
+      </p:ext>
+    </p:extLst>
   </p:cSld>
   <p:clrMapOvr>
     <a:masterClrMapping/>
@@ -4733,7 +6109,1310 @@
 </p:sld>
 </file>
 
-<file path=ppt/slides/slide5.xml><?xml version="1.0" encoding="utf-8"?>
+<file path=ppt/slides/slide6.xml><?xml version="1.0" encoding="utf-8"?>
+<p:sld xmlns:a="http://schemas.openxmlformats.org/drawingml/2006/main" xmlns:r="http://schemas.openxmlformats.org/officeDocument/2006/relationships" xmlns:p="http://schemas.openxmlformats.org/presentationml/2006/main">
+  <p:cSld>
+    <p:spTree>
+      <p:nvGrpSpPr>
+        <p:cNvPr id="1" name=""/>
+        <p:cNvGrpSpPr/>
+        <p:nvPr/>
+      </p:nvGrpSpPr>
+      <p:grpSpPr>
+        <a:xfrm>
+          <a:off x="0" y="0"/>
+          <a:ext cx="0" cy="0"/>
+          <a:chOff x="0" y="0"/>
+          <a:chExt cx="0" cy="0"/>
+        </a:xfrm>
+      </p:grpSpPr>
+      <p:sp>
+        <p:nvSpPr>
+          <p:cNvPr id="6" name="Rectangle: Rounded Corners 5">
+            <a:extLst>
+              <a:ext uri="{FF2B5EF4-FFF2-40B4-BE49-F238E27FC236}">
+                <a16:creationId xmlns:a16="http://schemas.microsoft.com/office/drawing/2014/main" id="{8AB90023-B41F-4D53-A0AC-0DF0707C2B75}"/>
+              </a:ext>
+            </a:extLst>
+          </p:cNvPr>
+          <p:cNvSpPr/>
+          <p:nvPr/>
+        </p:nvSpPr>
+        <p:spPr>
+          <a:xfrm>
+            <a:off x="6603999" y="2133599"/>
+            <a:ext cx="4900645" cy="4584441"/>
+          </a:xfrm>
+          <a:prstGeom prst="roundRect">
+            <a:avLst/>
+          </a:prstGeom>
+          <a:solidFill>
+            <a:srgbClr val="FCFBF4"/>
+          </a:solidFill>
+          <a:ln w="12700" cap="flat" cmpd="sng" algn="ctr">
+            <a:solidFill>
+              <a:srgbClr val="E6CF92"/>
+            </a:solidFill>
+            <a:prstDash val="solid"/>
+            <a:miter lim="800000"/>
+          </a:ln>
+        </p:spPr>
+        <p:style>
+          <a:lnRef idx="2">
+            <a:schemeClr val="accent1">
+              <a:shade val="15000"/>
+            </a:schemeClr>
+          </a:lnRef>
+          <a:fillRef idx="1">
+            <a:schemeClr val="accent1"/>
+          </a:fillRef>
+          <a:effectRef idx="0">
+            <a:schemeClr val="accent1"/>
+          </a:effectRef>
+          <a:fontRef idx="minor">
+            <a:schemeClr val="lt1"/>
+          </a:fontRef>
+        </p:style>
+        <p:txBody>
+          <a:bodyPr vertOverflow="clip" horzOverflow="clip" rtlCol="0" anchor="t"/>
+          <a:lstStyle/>
+          <a:p>
+            <a:pPr algn="l"/>
+            <a:endParaRPr lang="en-CA"/>
+          </a:p>
+        </p:txBody>
+      </p:sp>
+      <p:sp>
+        <p:nvSpPr>
+          <p:cNvPr id="4" name="Rectangle: Rounded Corners 3">
+            <a:extLst>
+              <a:ext uri="{FF2B5EF4-FFF2-40B4-BE49-F238E27FC236}">
+                <a16:creationId xmlns:a16="http://schemas.microsoft.com/office/drawing/2014/main" id="{99503CB7-6121-41C1-88F4-A85387DCDBDE}"/>
+              </a:ext>
+            </a:extLst>
+          </p:cNvPr>
+          <p:cNvSpPr/>
+          <p:nvPr/>
+        </p:nvSpPr>
+        <p:spPr>
+          <a:xfrm>
+            <a:off x="762000" y="2133600"/>
+            <a:ext cx="4826000" cy="4445000"/>
+          </a:xfrm>
+          <a:prstGeom prst="roundRect">
+            <a:avLst/>
+          </a:prstGeom>
+          <a:solidFill>
+            <a:srgbClr val="FCFBF4"/>
+          </a:solidFill>
+          <a:ln w="12700" cap="flat" cmpd="sng" algn="ctr">
+            <a:solidFill>
+              <a:srgbClr val="E6CF92"/>
+            </a:solidFill>
+            <a:prstDash val="solid"/>
+            <a:miter lim="800000"/>
+          </a:ln>
+        </p:spPr>
+        <p:style>
+          <a:lnRef idx="2">
+            <a:schemeClr val="accent1">
+              <a:shade val="15000"/>
+            </a:schemeClr>
+          </a:lnRef>
+          <a:fillRef idx="1">
+            <a:schemeClr val="accent1"/>
+          </a:fillRef>
+          <a:effectRef idx="0">
+            <a:schemeClr val="accent1"/>
+          </a:effectRef>
+          <a:fontRef idx="minor">
+            <a:schemeClr val="lt1"/>
+          </a:fontRef>
+        </p:style>
+        <p:txBody>
+          <a:bodyPr vertOverflow="clip" horzOverflow="clip" rtlCol="0" anchor="t"/>
+          <a:lstStyle/>
+          <a:p>
+            <a:pPr algn="l"/>
+            <a:endParaRPr lang="en-CA"/>
+          </a:p>
+        </p:txBody>
+      </p:sp>
+      <p:sp>
+        <p:nvSpPr>
+          <p:cNvPr id="2" name="TextBox 1">
+            <a:extLst>
+              <a:ext uri="{FF2B5EF4-FFF2-40B4-BE49-F238E27FC236}">
+                <a16:creationId xmlns:a16="http://schemas.microsoft.com/office/drawing/2014/main" id="{FE9AEA4D-FDD1-498F-ADCB-6E3B8D1BC1A0}"/>
+              </a:ext>
+            </a:extLst>
+          </p:cNvPr>
+          <p:cNvSpPr txBox="1"/>
+          <p:nvPr/>
+        </p:nvSpPr>
+        <p:spPr>
+          <a:xfrm>
+            <a:off x="508000" y="254000"/>
+            <a:ext cx="11176000" cy="533400"/>
+          </a:xfrm>
+          <a:prstGeom prst="rect">
+            <a:avLst/>
+          </a:prstGeom>
+          <a:noFill/>
+        </p:spPr>
+        <p:txBody>
+          <a:bodyPr vertOverflow="overflow" vert="horz" wrap="square" rtlCol="0" anchor="t">
+            <a:spAutoFit/>
+          </a:bodyPr>
+          <a:lstStyle/>
+          <a:p>
+            <a:pPr algn="l"/>
+            <a:r>
+              <a:rPr lang="en-US" sz="2800" b="1">
+                <a:solidFill>
+                  <a:srgbClr val="1E3A8A"/>
+                </a:solidFill>
+                <a:latin typeface="Cambria"/>
+                <a:ea typeface="Cambria"/>
+              </a:rPr>
+              <a:t>How a request is authorized — session gate flow</a:t>
+            </a:r>
+            <a:endParaRPr lang="en-CA" sz="2800" b="1">
+              <a:solidFill>
+                <a:srgbClr val="1E3A8A"/>
+              </a:solidFill>
+              <a:latin typeface="Cambria"/>
+              <a:ea typeface="Cambria"/>
+            </a:endParaRPr>
+          </a:p>
+        </p:txBody>
+      </p:sp>
+      <p:sp>
+        <p:nvSpPr>
+          <p:cNvPr id="3" name="TextBox 2">
+            <a:extLst>
+              <a:ext uri="{FF2B5EF4-FFF2-40B4-BE49-F238E27FC236}">
+                <a16:creationId xmlns:a16="http://schemas.microsoft.com/office/drawing/2014/main" id="{0A73DCC7-DBF8-4B2D-BB6F-BF24A3789409}"/>
+              </a:ext>
+            </a:extLst>
+          </p:cNvPr>
+          <p:cNvSpPr txBox="1"/>
+          <p:nvPr/>
+        </p:nvSpPr>
+        <p:spPr>
+          <a:xfrm>
+            <a:off x="508000" y="787400"/>
+            <a:ext cx="11176000" cy="304800"/>
+          </a:xfrm>
+          <a:prstGeom prst="rect">
+            <a:avLst/>
+          </a:prstGeom>
+          <a:noFill/>
+        </p:spPr>
+        <p:txBody>
+          <a:bodyPr vertOverflow="overflow" vert="horz" wrap="square" rtlCol="0" anchor="t">
+            <a:spAutoFit/>
+          </a:bodyPr>
+          <a:lstStyle/>
+          <a:p>
+            <a:pPr algn="l"/>
+            <a:r>
+              <a:rPr lang="en-US" sz="1300">
+                <a:solidFill>
+                  <a:srgbClr val="475569"/>
+                </a:solidFill>
+                <a:latin typeface="Calibri"/>
+                <a:ea typeface="Calibri"/>
+                <a:cs typeface="Calibri"/>
+              </a:rPr>
+              <a:t>The httpOnly cookie is the only client-side credential — every role and session check happens server-side against Aurora.</a:t>
+            </a:r>
+            <a:endParaRPr lang="en-CA" sz="1300">
+              <a:solidFill>
+                <a:srgbClr val="475569"/>
+              </a:solidFill>
+              <a:latin typeface="Calibri"/>
+              <a:ea typeface="Calibri"/>
+              <a:cs typeface="Calibri"/>
+            </a:endParaRPr>
+          </a:p>
+        </p:txBody>
+      </p:sp>
+      <p:sp>
+        <p:nvSpPr>
+          <p:cNvPr id="5" name="TextBox 4">
+            <a:extLst>
+              <a:ext uri="{FF2B5EF4-FFF2-40B4-BE49-F238E27FC236}">
+                <a16:creationId xmlns:a16="http://schemas.microsoft.com/office/drawing/2014/main" id="{93BFBDAA-8F69-4A77-9CA0-86890A749AE3}"/>
+              </a:ext>
+            </a:extLst>
+          </p:cNvPr>
+          <p:cNvSpPr txBox="1"/>
+          <p:nvPr/>
+        </p:nvSpPr>
+        <p:spPr>
+          <a:xfrm>
+            <a:off x="939800" y="2235200"/>
+            <a:ext cx="4470400" cy="254000"/>
+          </a:xfrm>
+          <a:prstGeom prst="rect">
+            <a:avLst/>
+          </a:prstGeom>
+          <a:noFill/>
+        </p:spPr>
+        <p:txBody>
+          <a:bodyPr vertOverflow="overflow" vert="horz" wrap="square" rtlCol="0" anchor="t">
+            <a:spAutoFit/>
+          </a:bodyPr>
+          <a:lstStyle/>
+          <a:p>
+            <a:pPr algn="l"/>
+            <a:r>
+              <a:rPr lang="en-US" sz="1100" b="1">
+                <a:solidFill>
+                  <a:srgbClr val="9A7A1F"/>
+                </a:solidFill>
+                <a:latin typeface="Calibri"/>
+                <a:ea typeface="Calibri"/>
+                <a:cs typeface="Calibri"/>
+              </a:rPr>
+              <a:t>Vercel Edge — middleware runs (no DB)</a:t>
+            </a:r>
+            <a:endParaRPr lang="en-CA" sz="1100" b="1">
+              <a:solidFill>
+                <a:srgbClr val="9A7A1F"/>
+              </a:solidFill>
+              <a:latin typeface="Calibri"/>
+              <a:ea typeface="Calibri"/>
+              <a:cs typeface="Calibri"/>
+            </a:endParaRPr>
+          </a:p>
+        </p:txBody>
+      </p:sp>
+      <p:sp>
+        <p:nvSpPr>
+          <p:cNvPr id="7" name="TextBox 6">
+            <a:extLst>
+              <a:ext uri="{FF2B5EF4-FFF2-40B4-BE49-F238E27FC236}">
+                <a16:creationId xmlns:a16="http://schemas.microsoft.com/office/drawing/2014/main" id="{5BA170DC-10F8-406A-B647-0D9AB9428651}"/>
+              </a:ext>
+            </a:extLst>
+          </p:cNvPr>
+          <p:cNvSpPr txBox="1"/>
+          <p:nvPr/>
+        </p:nvSpPr>
+        <p:spPr>
+          <a:xfrm>
+            <a:off x="6781800" y="2235200"/>
+            <a:ext cx="4470400" cy="254000"/>
+          </a:xfrm>
+          <a:prstGeom prst="rect">
+            <a:avLst/>
+          </a:prstGeom>
+          <a:noFill/>
+        </p:spPr>
+        <p:txBody>
+          <a:bodyPr vertOverflow="overflow" vert="horz" wrap="square" rtlCol="0" anchor="t">
+            <a:spAutoFit/>
+          </a:bodyPr>
+          <a:lstStyle/>
+          <a:p>
+            <a:pPr algn="l"/>
+            <a:r>
+              <a:rPr lang="en-CA" sz="1100" b="1">
+                <a:solidFill>
+                  <a:srgbClr val="9A7A1F"/>
+                </a:solidFill>
+                <a:latin typeface="Calibri"/>
+                <a:ea typeface="Calibri"/>
+                <a:cs typeface="Calibri"/>
+              </a:rPr>
+              <a:t>Vercel Serverless — route handler</a:t>
+            </a:r>
+          </a:p>
+        </p:txBody>
+      </p:sp>
+      <p:sp>
+        <p:nvSpPr>
+          <p:cNvPr id="8" name="Rectangle: Rounded Corners 7">
+            <a:extLst>
+              <a:ext uri="{FF2B5EF4-FFF2-40B4-BE49-F238E27FC236}">
+                <a16:creationId xmlns:a16="http://schemas.microsoft.com/office/drawing/2014/main" id="{847ACA0A-EFAA-44AF-91F4-C709929E8F79}"/>
+              </a:ext>
+            </a:extLst>
+          </p:cNvPr>
+          <p:cNvSpPr/>
+          <p:nvPr/>
+        </p:nvSpPr>
+        <p:spPr>
+          <a:xfrm>
+            <a:off x="3937000" y="1168400"/>
+            <a:ext cx="4318000" cy="711200"/>
+          </a:xfrm>
+          <a:prstGeom prst="roundRect">
+            <a:avLst/>
+          </a:prstGeom>
+          <a:solidFill>
+            <a:srgbClr val="F0F6FF"/>
+          </a:solidFill>
+          <a:ln w="12700" cap="flat" cmpd="sng" algn="ctr">
+            <a:solidFill>
+              <a:srgbClr val="D5DEEC"/>
+            </a:solidFill>
+            <a:prstDash val="solid"/>
+            <a:miter lim="800000"/>
+          </a:ln>
+        </p:spPr>
+        <p:style>
+          <a:lnRef idx="2">
+            <a:schemeClr val="accent1">
+              <a:shade val="15000"/>
+            </a:schemeClr>
+          </a:lnRef>
+          <a:fillRef idx="1">
+            <a:schemeClr val="accent1"/>
+          </a:fillRef>
+          <a:effectRef idx="0">
+            <a:schemeClr val="accent1"/>
+          </a:effectRef>
+          <a:fontRef idx="minor">
+            <a:schemeClr val="lt1"/>
+          </a:fontRef>
+        </p:style>
+        <p:txBody>
+          <a:bodyPr vertOverflow="clip" horzOverflow="clip" wrap="square" rtlCol="0" anchor="ctr" anchorCtr="0">
+            <a:noAutofit/>
+          </a:bodyPr>
+          <a:lstStyle/>
+          <a:p>
+            <a:pPr algn="l"/>
+            <a:r>
+              <a:rPr lang="en-CA" sz="1200">
+                <a:solidFill>
+                  <a:srgbClr val="1E293B"/>
+                </a:solidFill>
+                <a:latin typeface="Calibri"/>
+                <a:ea typeface="Calibri"/>
+                <a:cs typeface="Calibri"/>
+              </a:rPr>
+              <a:t>Browser — sends httpOnly cookie edsynapse_session
+(no role / token in JS storage)</a:t>
+            </a:r>
+          </a:p>
+        </p:txBody>
+      </p:sp>
+      <p:sp>
+        <p:nvSpPr>
+          <p:cNvPr id="9" name="Diamond 8">
+            <a:extLst>
+              <a:ext uri="{FF2B5EF4-FFF2-40B4-BE49-F238E27FC236}">
+                <a16:creationId xmlns:a16="http://schemas.microsoft.com/office/drawing/2014/main" id="{8AE1BFE5-E3B7-4304-BD6F-EF0416F3764E}"/>
+              </a:ext>
+            </a:extLst>
+          </p:cNvPr>
+          <p:cNvSpPr/>
+          <p:nvPr/>
+        </p:nvSpPr>
+        <p:spPr>
+          <a:xfrm>
+            <a:off x="1524000" y="2819400"/>
+            <a:ext cx="3302000" cy="1320800"/>
+          </a:xfrm>
+          <a:prstGeom prst="diamond">
+            <a:avLst/>
+          </a:prstGeom>
+          <a:solidFill>
+            <a:srgbClr val="EDE9FE"/>
+          </a:solidFill>
+          <a:ln w="12700" cap="flat" cmpd="sng" algn="ctr">
+            <a:solidFill>
+              <a:srgbClr val="C4B5FD"/>
+            </a:solidFill>
+            <a:prstDash val="solid"/>
+            <a:miter lim="800000"/>
+          </a:ln>
+        </p:spPr>
+        <p:style>
+          <a:lnRef idx="2">
+            <a:schemeClr val="accent1">
+              <a:shade val="15000"/>
+            </a:schemeClr>
+          </a:lnRef>
+          <a:fillRef idx="1">
+            <a:schemeClr val="accent1"/>
+          </a:fillRef>
+          <a:effectRef idx="0">
+            <a:schemeClr val="accent1"/>
+          </a:effectRef>
+          <a:fontRef idx="minor">
+            <a:schemeClr val="lt1"/>
+          </a:fontRef>
+        </p:style>
+        <p:txBody>
+          <a:bodyPr vertOverflow="clip" horzOverflow="clip" wrap="square" rtlCol="0" anchor="ctr" anchorCtr="0">
+            <a:noAutofit/>
+          </a:bodyPr>
+          <a:lstStyle/>
+          <a:p>
+            <a:pPr algn="l"/>
+            <a:r>
+              <a:rPr lang="en-CA" sz="1200" b="1">
+                <a:solidFill>
+                  <a:srgbClr val="4C1D95"/>
+                </a:solidFill>
+                <a:latin typeface="Calibri"/>
+                <a:ea typeface="Calibri"/>
+                <a:cs typeface="Calibri"/>
+              </a:rPr>
+              <a:t>edsynapse_session
+cookie present?</a:t>
+            </a:r>
+          </a:p>
+        </p:txBody>
+      </p:sp>
+      <p:sp>
+        <p:nvSpPr>
+          <p:cNvPr id="10" name="Rectangle: Rounded Corners 9">
+            <a:extLst>
+              <a:ext uri="{FF2B5EF4-FFF2-40B4-BE49-F238E27FC236}">
+                <a16:creationId xmlns:a16="http://schemas.microsoft.com/office/drawing/2014/main" id="{F04E96A3-2B85-4965-A68A-0A5CFF40639E}"/>
+              </a:ext>
+            </a:extLst>
+          </p:cNvPr>
+          <p:cNvSpPr/>
+          <p:nvPr/>
+        </p:nvSpPr>
+        <p:spPr>
+          <a:xfrm>
+            <a:off x="1651000" y="5130800"/>
+            <a:ext cx="3048000" cy="635000"/>
+          </a:xfrm>
+          <a:prstGeom prst="roundRect">
+            <a:avLst/>
+          </a:prstGeom>
+          <a:solidFill>
+            <a:srgbClr val="F0F6FF"/>
+          </a:solidFill>
+          <a:ln w="12700" cap="flat" cmpd="sng" algn="ctr">
+            <a:solidFill>
+              <a:srgbClr val="D5DEEC"/>
+            </a:solidFill>
+            <a:prstDash val="solid"/>
+            <a:miter lim="800000"/>
+          </a:ln>
+        </p:spPr>
+        <p:style>
+          <a:lnRef idx="2">
+            <a:schemeClr val="accent1">
+              <a:shade val="15000"/>
+            </a:schemeClr>
+          </a:lnRef>
+          <a:fillRef idx="1">
+            <a:schemeClr val="accent1"/>
+          </a:fillRef>
+          <a:effectRef idx="0">
+            <a:schemeClr val="accent1"/>
+          </a:effectRef>
+          <a:fontRef idx="minor">
+            <a:schemeClr val="lt1"/>
+          </a:fontRef>
+        </p:style>
+        <p:txBody>
+          <a:bodyPr vertOverflow="clip" horzOverflow="clip" wrap="square" rtlCol="0" anchor="ctr" anchorCtr="0">
+            <a:noAutofit/>
+          </a:bodyPr>
+          <a:lstStyle/>
+          <a:p>
+            <a:pPr algn="l"/>
+            <a:r>
+              <a:rPr lang="en-CA" sz="1300">
+                <a:solidFill>
+                  <a:srgbClr val="1E293B"/>
+                </a:solidFill>
+                <a:latin typeface="Calibri"/>
+                <a:ea typeface="Calibri"/>
+                <a:cs typeface="Calibri"/>
+              </a:rPr>
+              <a:t>302 → /sign-in</a:t>
+            </a:r>
+          </a:p>
+        </p:txBody>
+      </p:sp>
+      <p:sp>
+        <p:nvSpPr>
+          <p:cNvPr id="11" name="Rectangle: Rounded Corners 10">
+            <a:extLst>
+              <a:ext uri="{FF2B5EF4-FFF2-40B4-BE49-F238E27FC236}">
+                <a16:creationId xmlns:a16="http://schemas.microsoft.com/office/drawing/2014/main" id="{BF24CF99-8733-4CB6-9C1E-33AF556E5105}"/>
+              </a:ext>
+            </a:extLst>
+          </p:cNvPr>
+          <p:cNvSpPr/>
+          <p:nvPr/>
+        </p:nvSpPr>
+        <p:spPr>
+          <a:xfrm>
+            <a:off x="7112000" y="2667000"/>
+            <a:ext cx="3810000" cy="533400"/>
+          </a:xfrm>
+          <a:prstGeom prst="roundRect">
+            <a:avLst/>
+          </a:prstGeom>
+          <a:solidFill>
+            <a:srgbClr val="EDE9FE"/>
+          </a:solidFill>
+          <a:ln w="12700" cap="flat" cmpd="sng" algn="ctr">
+            <a:solidFill>
+              <a:srgbClr val="C4B5FD"/>
+            </a:solidFill>
+            <a:prstDash val="solid"/>
+            <a:miter lim="800000"/>
+          </a:ln>
+        </p:spPr>
+        <p:style>
+          <a:lnRef idx="2">
+            <a:schemeClr val="accent1">
+              <a:shade val="15000"/>
+            </a:schemeClr>
+          </a:lnRef>
+          <a:fillRef idx="1">
+            <a:schemeClr val="accent1"/>
+          </a:fillRef>
+          <a:effectRef idx="0">
+            <a:schemeClr val="accent1"/>
+          </a:effectRef>
+          <a:fontRef idx="minor">
+            <a:schemeClr val="lt1"/>
+          </a:fontRef>
+        </p:style>
+        <p:txBody>
+          <a:bodyPr vertOverflow="clip" horzOverflow="clip" wrap="square" rtlCol="0" anchor="ctr" anchorCtr="0">
+            <a:noAutofit/>
+          </a:bodyPr>
+          <a:lstStyle/>
+          <a:p>
+            <a:pPr algn="l"/>
+            <a:r>
+              <a:rPr lang="en-CA" sz="1300" b="1">
+                <a:solidFill>
+                  <a:srgbClr val="4C1D95"/>
+                </a:solidFill>
+                <a:latin typeface="Calibri"/>
+                <a:ea typeface="Calibri"/>
+                <a:cs typeface="Calibri"/>
+              </a:rPr>
+              <a:t>requireUser(role?)</a:t>
+            </a:r>
+          </a:p>
+        </p:txBody>
+      </p:sp>
+      <p:sp>
+        <p:nvSpPr>
+          <p:cNvPr id="12" name="Cylinder 11">
+            <a:extLst>
+              <a:ext uri="{FF2B5EF4-FFF2-40B4-BE49-F238E27FC236}">
+                <a16:creationId xmlns:a16="http://schemas.microsoft.com/office/drawing/2014/main" id="{3B3AE9AF-BA25-4EF8-B082-601D24FE2C5F}"/>
+              </a:ext>
+            </a:extLst>
+          </p:cNvPr>
+          <p:cNvSpPr/>
+          <p:nvPr/>
+        </p:nvSpPr>
+        <p:spPr>
+          <a:xfrm>
+            <a:off x="7810500" y="3429000"/>
+            <a:ext cx="2413000" cy="863600"/>
+          </a:xfrm>
+          <a:prstGeom prst="can">
+            <a:avLst/>
+          </a:prstGeom>
+          <a:solidFill>
+            <a:srgbClr val="4F46E5"/>
+          </a:solidFill>
+          <a:ln w="12700" cap="flat" cmpd="sng" algn="ctr">
+            <a:solidFill>
+              <a:srgbClr val="3730A3"/>
+            </a:solidFill>
+            <a:prstDash val="solid"/>
+            <a:miter lim="800000"/>
+          </a:ln>
+        </p:spPr>
+        <p:style>
+          <a:lnRef idx="2">
+            <a:schemeClr val="accent1">
+              <a:shade val="15000"/>
+            </a:schemeClr>
+          </a:lnRef>
+          <a:fillRef idx="1">
+            <a:schemeClr val="accent1"/>
+          </a:fillRef>
+          <a:effectRef idx="0">
+            <a:schemeClr val="accent1"/>
+          </a:effectRef>
+          <a:fontRef idx="minor">
+            <a:schemeClr val="lt1"/>
+          </a:fontRef>
+        </p:style>
+        <p:txBody>
+          <a:bodyPr vertOverflow="clip" horzOverflow="clip" wrap="square" rtlCol="0" anchor="ctr" anchorCtr="0">
+            <a:noAutofit/>
+          </a:bodyPr>
+          <a:lstStyle/>
+          <a:p>
+            <a:pPr algn="l"/>
+            <a:r>
+              <a:rPr lang="en-US" sz="1100">
+                <a:solidFill>
+                  <a:srgbClr val="FFFFFF"/>
+                </a:solidFill>
+                <a:latin typeface="Calibri"/>
+                <a:ea typeface="Calibri"/>
+                <a:cs typeface="Calibri"/>
+              </a:rPr>
+              <a:t>Aurora — sessions ⋈ users
+token lookup · expiry · status</a:t>
+            </a:r>
+            <a:endParaRPr lang="en-CA" sz="1100">
+              <a:solidFill>
+                <a:srgbClr val="FFFFFF"/>
+              </a:solidFill>
+              <a:latin typeface="Calibri"/>
+              <a:ea typeface="Calibri"/>
+              <a:cs typeface="Calibri"/>
+            </a:endParaRPr>
+          </a:p>
+        </p:txBody>
+      </p:sp>
+      <p:sp>
+        <p:nvSpPr>
+          <p:cNvPr id="13" name="Diamond 12">
+            <a:extLst>
+              <a:ext uri="{FF2B5EF4-FFF2-40B4-BE49-F238E27FC236}">
+                <a16:creationId xmlns:a16="http://schemas.microsoft.com/office/drawing/2014/main" id="{445B3E80-B65E-43CF-9A23-D72459EB37C5}"/>
+              </a:ext>
+            </a:extLst>
+          </p:cNvPr>
+          <p:cNvSpPr/>
+          <p:nvPr/>
+        </p:nvSpPr>
+        <p:spPr>
+          <a:xfrm>
+            <a:off x="7556500" y="4445000"/>
+            <a:ext cx="2921000" cy="1219200"/>
+          </a:xfrm>
+          <a:prstGeom prst="diamond">
+            <a:avLst/>
+          </a:prstGeom>
+          <a:solidFill>
+            <a:srgbClr val="EDE9FE"/>
+          </a:solidFill>
+          <a:ln w="12700" cap="flat" cmpd="sng" algn="ctr">
+            <a:solidFill>
+              <a:srgbClr val="C4B5FD"/>
+            </a:solidFill>
+            <a:prstDash val="solid"/>
+            <a:miter lim="800000"/>
+          </a:ln>
+        </p:spPr>
+        <p:style>
+          <a:lnRef idx="2">
+            <a:schemeClr val="accent1">
+              <a:shade val="15000"/>
+            </a:schemeClr>
+          </a:lnRef>
+          <a:fillRef idx="1">
+            <a:schemeClr val="accent1"/>
+          </a:fillRef>
+          <a:effectRef idx="0">
+            <a:schemeClr val="accent1"/>
+          </a:effectRef>
+          <a:fontRef idx="minor">
+            <a:schemeClr val="lt1"/>
+          </a:fontRef>
+        </p:style>
+        <p:txBody>
+          <a:bodyPr vertOverflow="clip" horzOverflow="clip" wrap="square" rtlCol="0" anchor="ctr" anchorCtr="0">
+            <a:noAutofit/>
+          </a:bodyPr>
+          <a:lstStyle/>
+          <a:p>
+            <a:pPr algn="l"/>
+            <a:r>
+              <a:rPr lang="en-CA" sz="1200" b="1">
+                <a:solidFill>
+                  <a:srgbClr val="4C1D95"/>
+                </a:solidFill>
+                <a:latin typeface="Calibri"/>
+                <a:ea typeface="Calibri"/>
+                <a:cs typeface="Calibri"/>
+              </a:rPr>
+              <a:t>session valid
+&amp; role allowed?</a:t>
+            </a:r>
+          </a:p>
+        </p:txBody>
+      </p:sp>
+      <p:sp>
+        <p:nvSpPr>
+          <p:cNvPr id="14" name="Rectangle: Rounded Corners 13">
+            <a:extLst>
+              <a:ext uri="{FF2B5EF4-FFF2-40B4-BE49-F238E27FC236}">
+                <a16:creationId xmlns:a16="http://schemas.microsoft.com/office/drawing/2014/main" id="{CA586003-3142-4040-A417-ED6AB9CA9FF0}"/>
+              </a:ext>
+            </a:extLst>
+          </p:cNvPr>
+          <p:cNvSpPr/>
+          <p:nvPr/>
+        </p:nvSpPr>
+        <p:spPr>
+          <a:xfrm>
+            <a:off x="6858000" y="5816600"/>
+            <a:ext cx="2095500" cy="711200"/>
+          </a:xfrm>
+          <a:prstGeom prst="roundRect">
+            <a:avLst/>
+          </a:prstGeom>
+          <a:solidFill>
+            <a:srgbClr val="ECFDF5"/>
+          </a:solidFill>
+          <a:ln w="12700" cap="flat" cmpd="sng" algn="ctr">
+            <a:solidFill>
+              <a:srgbClr val="6EE7B7"/>
+            </a:solidFill>
+            <a:prstDash val="solid"/>
+            <a:miter lim="800000"/>
+          </a:ln>
+        </p:spPr>
+        <p:style>
+          <a:lnRef idx="2">
+            <a:schemeClr val="accent1">
+              <a:shade val="15000"/>
+            </a:schemeClr>
+          </a:lnRef>
+          <a:fillRef idx="1">
+            <a:schemeClr val="accent1"/>
+          </a:fillRef>
+          <a:effectRef idx="0">
+            <a:schemeClr val="accent1"/>
+          </a:effectRef>
+          <a:fontRef idx="minor">
+            <a:schemeClr val="lt1"/>
+          </a:fontRef>
+        </p:style>
+        <p:txBody>
+          <a:bodyPr vertOverflow="clip" horzOverflow="clip" wrap="square" rtlCol="0" anchor="ctr" anchorCtr="0">
+            <a:noAutofit/>
+          </a:bodyPr>
+          <a:lstStyle/>
+          <a:p>
+            <a:pPr algn="l"/>
+            <a:r>
+              <a:rPr lang="en-US" sz="1100">
+                <a:solidFill>
+                  <a:srgbClr val="065F46"/>
+                </a:solidFill>
+                <a:latin typeface="Calibri"/>
+                <a:ea typeface="Calibri"/>
+                <a:cs typeface="Calibri"/>
+              </a:rPr>
+              <a:t>Handler runs
+scoped to this user_id</a:t>
+            </a:r>
+            <a:endParaRPr lang="en-CA" sz="1100">
+              <a:solidFill>
+                <a:srgbClr val="065F46"/>
+              </a:solidFill>
+              <a:latin typeface="Calibri"/>
+              <a:ea typeface="Calibri"/>
+              <a:cs typeface="Calibri"/>
+            </a:endParaRPr>
+          </a:p>
+        </p:txBody>
+      </p:sp>
+      <p:sp>
+        <p:nvSpPr>
+          <p:cNvPr id="15" name="Rectangle: Rounded Corners 14">
+            <a:extLst>
+              <a:ext uri="{FF2B5EF4-FFF2-40B4-BE49-F238E27FC236}">
+                <a16:creationId xmlns:a16="http://schemas.microsoft.com/office/drawing/2014/main" id="{D3DE119C-3385-4D1B-9EF7-DF7E3153DE63}"/>
+              </a:ext>
+            </a:extLst>
+          </p:cNvPr>
+          <p:cNvSpPr/>
+          <p:nvPr/>
+        </p:nvSpPr>
+        <p:spPr>
+          <a:xfrm>
+            <a:off x="9144000" y="5816600"/>
+            <a:ext cx="2095500" cy="711200"/>
+          </a:xfrm>
+          <a:prstGeom prst="roundRect">
+            <a:avLst/>
+          </a:prstGeom>
+          <a:solidFill>
+            <a:srgbClr val="FEF2F2"/>
+          </a:solidFill>
+          <a:ln w="12700" cap="flat" cmpd="sng" algn="ctr">
+            <a:solidFill>
+              <a:srgbClr val="FCA5A5"/>
+            </a:solidFill>
+            <a:prstDash val="solid"/>
+            <a:miter lim="800000"/>
+          </a:ln>
+        </p:spPr>
+        <p:style>
+          <a:lnRef idx="2">
+            <a:schemeClr val="accent1">
+              <a:shade val="15000"/>
+            </a:schemeClr>
+          </a:lnRef>
+          <a:fillRef idx="1">
+            <a:schemeClr val="accent1"/>
+          </a:fillRef>
+          <a:effectRef idx="0">
+            <a:schemeClr val="accent1"/>
+          </a:effectRef>
+          <a:fontRef idx="minor">
+            <a:schemeClr val="lt1"/>
+          </a:fontRef>
+        </p:style>
+        <p:txBody>
+          <a:bodyPr vertOverflow="clip" horzOverflow="clip" wrap="square" rtlCol="0" anchor="ctr" anchorCtr="0">
+            <a:noAutofit/>
+          </a:bodyPr>
+          <a:lstStyle/>
+          <a:p>
+            <a:pPr algn="l"/>
+            <a:r>
+              <a:rPr lang="en-CA" sz="1200">
+                <a:solidFill>
+                  <a:srgbClr val="991B1B"/>
+                </a:solidFill>
+                <a:latin typeface="Calibri"/>
+                <a:ea typeface="Calibri"/>
+                <a:cs typeface="Calibri"/>
+              </a:rPr>
+              <a:t>AuthError → 401 / 403</a:t>
+            </a:r>
+          </a:p>
+        </p:txBody>
+      </p:sp>
+      <p:cxnSp>
+        <p:nvCxnSpPr>
+          <p:cNvPr id="600" name="conn600"/>
+          <p:cNvCxnSpPr/>
+          <p:nvPr/>
+        </p:nvCxnSpPr>
+        <p:spPr>
+          <a:xfrm flipH="1">
+            <a:off x="3175000" y="1879600"/>
+            <a:ext cx="2921000" cy="939800"/>
+          </a:xfrm>
+          <a:prstGeom prst="line">
+            <a:avLst/>
+          </a:prstGeom>
+          <a:ln w="19050" cap="rnd">
+            <a:solidFill>
+              <a:srgbClr val="94A3B8"/>
+            </a:solidFill>
+            <a:tailEnd type="triangle"/>
+          </a:ln>
+        </p:spPr>
+      </p:cxnSp>
+      <p:cxnSp>
+        <p:nvCxnSpPr>
+          <p:cNvPr id="601" name="conn601"/>
+          <p:cNvCxnSpPr/>
+          <p:nvPr/>
+        </p:nvCxnSpPr>
+        <p:spPr>
+          <a:xfrm>
+            <a:off x="3175000" y="4140200"/>
+            <a:ext cx="0" cy="990600"/>
+          </a:xfrm>
+          <a:prstGeom prst="line">
+            <a:avLst/>
+          </a:prstGeom>
+          <a:ln w="19050" cap="rnd">
+            <a:solidFill>
+              <a:srgbClr val="94A3B8"/>
+            </a:solidFill>
+            <a:tailEnd type="triangle"/>
+          </a:ln>
+        </p:spPr>
+      </p:cxnSp>
+      <p:cxnSp>
+        <p:nvCxnSpPr>
+          <p:cNvPr id="602" name="conn602"/>
+          <p:cNvCxnSpPr/>
+          <p:nvPr/>
+        </p:nvCxnSpPr>
+        <p:spPr>
+          <a:xfrm flipV="1">
+            <a:off x="4445000" y="2933700"/>
+            <a:ext cx="2667000" cy="546100"/>
+          </a:xfrm>
+          <a:prstGeom prst="line">
+            <a:avLst/>
+          </a:prstGeom>
+          <a:ln w="19050" cap="rnd">
+            <a:solidFill>
+              <a:srgbClr val="94A3B8"/>
+            </a:solidFill>
+            <a:tailEnd type="triangle"/>
+          </a:ln>
+        </p:spPr>
+      </p:cxnSp>
+      <p:cxnSp>
+        <p:nvCxnSpPr>
+          <p:cNvPr id="603" name="conn603"/>
+          <p:cNvCxnSpPr/>
+          <p:nvPr/>
+        </p:nvCxnSpPr>
+        <p:spPr>
+          <a:xfrm>
+            <a:off x="9017000" y="3200400"/>
+            <a:ext cx="0" cy="228600"/>
+          </a:xfrm>
+          <a:prstGeom prst="line">
+            <a:avLst/>
+          </a:prstGeom>
+          <a:ln w="19050" cap="rnd">
+            <a:solidFill>
+              <a:srgbClr val="94A3B8"/>
+            </a:solidFill>
+            <a:tailEnd type="triangle"/>
+          </a:ln>
+        </p:spPr>
+      </p:cxnSp>
+      <p:cxnSp>
+        <p:nvCxnSpPr>
+          <p:cNvPr id="604" name="conn604"/>
+          <p:cNvCxnSpPr/>
+          <p:nvPr/>
+        </p:nvCxnSpPr>
+        <p:spPr>
+          <a:xfrm>
+            <a:off x="9017000" y="4292600"/>
+            <a:ext cx="0" cy="152400"/>
+          </a:xfrm>
+          <a:prstGeom prst="line">
+            <a:avLst/>
+          </a:prstGeom>
+          <a:ln w="19050" cap="rnd">
+            <a:solidFill>
+              <a:srgbClr val="94A3B8"/>
+            </a:solidFill>
+            <a:tailEnd type="triangle"/>
+          </a:ln>
+        </p:spPr>
+      </p:cxnSp>
+      <p:cxnSp>
+        <p:nvCxnSpPr>
+          <p:cNvPr id="605" name="conn605"/>
+          <p:cNvCxnSpPr/>
+          <p:nvPr/>
+        </p:nvCxnSpPr>
+        <p:spPr>
+          <a:xfrm flipH="1">
+            <a:off x="7899400" y="5461000"/>
+            <a:ext cx="736600" cy="355600"/>
+          </a:xfrm>
+          <a:prstGeom prst="line">
+            <a:avLst/>
+          </a:prstGeom>
+          <a:ln w="19050" cap="rnd">
+            <a:solidFill>
+              <a:srgbClr val="94A3B8"/>
+            </a:solidFill>
+            <a:tailEnd type="triangle"/>
+          </a:ln>
+        </p:spPr>
+      </p:cxnSp>
+      <p:cxnSp>
+        <p:nvCxnSpPr>
+          <p:cNvPr id="606" name="conn606"/>
+          <p:cNvCxnSpPr/>
+          <p:nvPr/>
+        </p:nvCxnSpPr>
+        <p:spPr>
+          <a:xfrm>
+            <a:off x="9398000" y="5461000"/>
+            <a:ext cx="787400" cy="355600"/>
+          </a:xfrm>
+          <a:prstGeom prst="line">
+            <a:avLst/>
+          </a:prstGeom>
+          <a:ln w="19050" cap="rnd">
+            <a:solidFill>
+              <a:srgbClr val="94A3B8"/>
+            </a:solidFill>
+            <a:tailEnd type="triangle"/>
+          </a:ln>
+        </p:spPr>
+      </p:cxnSp>
+      <p:sp>
+        <p:nvSpPr>
+          <p:cNvPr id="16" name="TextBox 15">
+            <a:extLst>
+              <a:ext uri="{FF2B5EF4-FFF2-40B4-BE49-F238E27FC236}">
+                <a16:creationId xmlns:a16="http://schemas.microsoft.com/office/drawing/2014/main" id="{DCBD4CAD-AB06-4176-915F-511361003E89}"/>
+              </a:ext>
+            </a:extLst>
+          </p:cNvPr>
+          <p:cNvSpPr txBox="1"/>
+          <p:nvPr/>
+        </p:nvSpPr>
+        <p:spPr>
+          <a:xfrm>
+            <a:off x="3746500" y="2133600"/>
+            <a:ext cx="2667000" cy="228600"/>
+          </a:xfrm>
+          <a:prstGeom prst="rect">
+            <a:avLst/>
+          </a:prstGeom>
+          <a:solidFill>
+            <a:srgbClr val="FCFBF4"/>
+          </a:solidFill>
+          <a:ln>
+            <a:noFill/>
+          </a:ln>
+        </p:spPr>
+        <p:txBody>
+          <a:bodyPr vertOverflow="overflow" vert="horz" wrap="none" rtlCol="0" anchor="ctr" anchorCtr="0">
+            <a:noAutofit/>
+          </a:bodyPr>
+          <a:lstStyle/>
+          <a:p>
+            <a:pPr algn="l"/>
+            <a:r>
+              <a:rPr lang="en-US" sz="1000">
+                <a:solidFill>
+                  <a:srgbClr val="475569"/>
+                </a:solidFill>
+                <a:latin typeface="Calibri"/>
+                <a:ea typeface="Calibri"/>
+                <a:cs typeface="Calibri"/>
+              </a:rPr>
+              <a:t>request to /student · /teacher · /admin</a:t>
+            </a:r>
+            <a:endParaRPr lang="en-CA" sz="1000">
+              <a:solidFill>
+                <a:srgbClr val="475569"/>
+              </a:solidFill>
+              <a:latin typeface="Calibri"/>
+              <a:ea typeface="Calibri"/>
+              <a:cs typeface="Calibri"/>
+            </a:endParaRPr>
+          </a:p>
+        </p:txBody>
+      </p:sp>
+      <p:sp>
+        <p:nvSpPr>
+          <p:cNvPr id="17" name="TextBox 16">
+            <a:extLst>
+              <a:ext uri="{FF2B5EF4-FFF2-40B4-BE49-F238E27FC236}">
+                <a16:creationId xmlns:a16="http://schemas.microsoft.com/office/drawing/2014/main" id="{8A33DD21-F62E-4FB8-A856-8E906296C20D}"/>
+              </a:ext>
+            </a:extLst>
+          </p:cNvPr>
+          <p:cNvSpPr txBox="1"/>
+          <p:nvPr/>
+        </p:nvSpPr>
+        <p:spPr>
+          <a:xfrm>
+            <a:off x="2514600" y="4597400"/>
+            <a:ext cx="1320800" cy="228600"/>
+          </a:xfrm>
+          <a:prstGeom prst="rect">
+            <a:avLst/>
+          </a:prstGeom>
+          <a:solidFill>
+            <a:srgbClr val="FCFBF4"/>
+          </a:solidFill>
+          <a:ln>
+            <a:noFill/>
+          </a:ln>
+        </p:spPr>
+        <p:txBody>
+          <a:bodyPr vertOverflow="overflow" vert="horz" wrap="none" rtlCol="0" anchor="ctr" anchorCtr="0">
+            <a:noAutofit/>
+          </a:bodyPr>
+          <a:lstStyle/>
+          <a:p>
+            <a:pPr algn="l"/>
+            <a:r>
+              <a:rPr lang="en-CA" sz="1000">
+                <a:solidFill>
+                  <a:srgbClr val="475569"/>
+                </a:solidFill>
+                <a:latin typeface="Calibri"/>
+                <a:ea typeface="Calibri"/>
+                <a:cs typeface="Calibri"/>
+              </a:rPr>
+              <a:t>no cookie</a:t>
+            </a:r>
+          </a:p>
+        </p:txBody>
+      </p:sp>
+      <p:sp>
+        <p:nvSpPr>
+          <p:cNvPr id="18" name="TextBox 17">
+            <a:extLst>
+              <a:ext uri="{FF2B5EF4-FFF2-40B4-BE49-F238E27FC236}">
+                <a16:creationId xmlns:a16="http://schemas.microsoft.com/office/drawing/2014/main" id="{18BC6EFE-C4A3-48F7-8F36-193C3DA60A4D}"/>
+              </a:ext>
+            </a:extLst>
+          </p:cNvPr>
+          <p:cNvSpPr txBox="1"/>
+          <p:nvPr/>
+        </p:nvSpPr>
+        <p:spPr>
+          <a:xfrm>
+            <a:off x="5054600" y="2946400"/>
+            <a:ext cx="1447800" cy="228600"/>
+          </a:xfrm>
+          <a:prstGeom prst="rect">
+            <a:avLst/>
+          </a:prstGeom>
+          <a:solidFill>
+            <a:srgbClr val="FCFBF4"/>
+          </a:solidFill>
+          <a:ln>
+            <a:noFill/>
+          </a:ln>
+        </p:spPr>
+        <p:txBody>
+          <a:bodyPr vertOverflow="overflow" vert="horz" wrap="none" rtlCol="0" anchor="ctr" anchorCtr="0">
+            <a:noAutofit/>
+          </a:bodyPr>
+          <a:lstStyle/>
+          <a:p>
+            <a:pPr algn="l"/>
+            <a:r>
+              <a:rPr lang="en-CA" sz="1000">
+                <a:solidFill>
+                  <a:srgbClr val="475569"/>
+                </a:solidFill>
+                <a:latin typeface="Calibri"/>
+                <a:ea typeface="Calibri"/>
+                <a:cs typeface="Calibri"/>
+              </a:rPr>
+              <a:t>cookie present</a:t>
+            </a:r>
+          </a:p>
+        </p:txBody>
+      </p:sp>
+      <p:sp>
+        <p:nvSpPr>
+          <p:cNvPr id="19" name="TextBox 18">
+            <a:extLst>
+              <a:ext uri="{FF2B5EF4-FFF2-40B4-BE49-F238E27FC236}">
+                <a16:creationId xmlns:a16="http://schemas.microsoft.com/office/drawing/2014/main" id="{C612D4E9-6E4F-4DCE-B134-A25C30ADDC12}"/>
+              </a:ext>
+            </a:extLst>
+          </p:cNvPr>
+          <p:cNvSpPr txBox="1"/>
+          <p:nvPr/>
+        </p:nvSpPr>
+        <p:spPr>
+          <a:xfrm>
+            <a:off x="7493000" y="5486400"/>
+            <a:ext cx="558800" cy="228600"/>
+          </a:xfrm>
+          <a:prstGeom prst="rect">
+            <a:avLst/>
+          </a:prstGeom>
+          <a:solidFill>
+            <a:srgbClr val="FCFBF4"/>
+          </a:solidFill>
+          <a:ln>
+            <a:noFill/>
+          </a:ln>
+        </p:spPr>
+        <p:txBody>
+          <a:bodyPr vertOverflow="overflow" vert="horz" wrap="none" rtlCol="0" anchor="ctr" anchorCtr="0">
+            <a:noAutofit/>
+          </a:bodyPr>
+          <a:lstStyle/>
+          <a:p>
+            <a:pPr algn="l"/>
+            <a:r>
+              <a:rPr lang="en-CA" sz="1000">
+                <a:solidFill>
+                  <a:srgbClr val="475569"/>
+                </a:solidFill>
+                <a:latin typeface="Calibri"/>
+                <a:ea typeface="Calibri"/>
+                <a:cs typeface="Calibri"/>
+              </a:rPr>
+              <a:t>yes</a:t>
+            </a:r>
+          </a:p>
+        </p:txBody>
+      </p:sp>
+      <p:sp>
+        <p:nvSpPr>
+          <p:cNvPr id="20" name="TextBox 19">
+            <a:extLst>
+              <a:ext uri="{FF2B5EF4-FFF2-40B4-BE49-F238E27FC236}">
+                <a16:creationId xmlns:a16="http://schemas.microsoft.com/office/drawing/2014/main" id="{11DD9CE2-11B6-40BE-8B1B-05C497C2D2C7}"/>
+              </a:ext>
+            </a:extLst>
+          </p:cNvPr>
+          <p:cNvSpPr txBox="1"/>
+          <p:nvPr/>
+        </p:nvSpPr>
+        <p:spPr>
+          <a:xfrm>
+            <a:off x="9677400" y="5461000"/>
+            <a:ext cx="1397000" cy="228600"/>
+          </a:xfrm>
+          <a:prstGeom prst="rect">
+            <a:avLst/>
+          </a:prstGeom>
+          <a:solidFill>
+            <a:srgbClr val="FCFBF4"/>
+          </a:solidFill>
+          <a:ln>
+            <a:noFill/>
+          </a:ln>
+        </p:spPr>
+        <p:txBody>
+          <a:bodyPr vertOverflow="overflow" vert="horz" wrap="none" rtlCol="0" anchor="ctr" anchorCtr="0">
+            <a:noAutofit/>
+          </a:bodyPr>
+          <a:lstStyle/>
+          <a:p>
+            <a:pPr algn="l"/>
+            <a:r>
+              <a:rPr lang="en-CA" sz="1000">
+                <a:solidFill>
+                  <a:srgbClr val="475569"/>
+                </a:solidFill>
+                <a:latin typeface="Calibri"/>
+                <a:ea typeface="Calibri"/>
+                <a:cs typeface="Calibri"/>
+              </a:rPr>
+              <a:t>no / wrong role</a:t>
+            </a:r>
+          </a:p>
+        </p:txBody>
+      </p:sp>
+    </p:spTree>
+    <p:extLst>
+      <p:ext uri="{BB962C8B-B14F-4D97-AF65-F5344CB8AC3E}">
+        <p14:creationId xmlns:p14="http://schemas.microsoft.com/office/powerpoint/2010/main" val="181524826"/>
+      </p:ext>
+    </p:extLst>
+  </p:cSld>
+  <p:clrMapOvr>
+    <a:masterClrMapping/>
+  </p:clrMapOvr>
+</p:sld>
+</file>
+
+<file path=ppt/slides/slide7.xml><?xml version="1.0" encoding="utf-8"?>
 <p:sld xmlns:a="http://schemas.openxmlformats.org/drawingml/2006/main" xmlns:r="http://schemas.openxmlformats.org/officeDocument/2006/relationships" xmlns:p="http://schemas.openxmlformats.org/presentationml/2006/main">
   <p:cSld name="Slide 5">
     <p:bg>
@@ -5109,48 +7788,6 @@
           </a:p>
         </p:txBody>
       </p:sp>
-      <p:sp>
-        <p:nvSpPr>
-          <p:cNvPr id="9" name="Text 7"/>
-          <p:cNvSpPr/>
-          <p:nvPr/>
-        </p:nvSpPr>
-        <p:spPr>
-          <a:xfrm>
-            <a:off x="7772400" y="3611880"/>
-            <a:ext cx="3657600" cy="1280160"/>
-          </a:xfrm>
-          <a:prstGeom prst="rect">
-            <a:avLst/>
-          </a:prstGeom>
-          <a:noFill/>
-          <a:ln/>
-        </p:spPr>
-        <p:txBody>
-          <a:bodyPr wrap="square" lIns="0" tIns="0" rIns="0" bIns="0" rtlCol="0" anchor="t"/>
-          <a:lstStyle/>
-          <a:p>
-            <a:pPr marL="0" indent="0">
-              <a:lnSpc>
-                <a:spcPct val="112000"/>
-              </a:lnSpc>
-              <a:buNone/>
-            </a:pPr>
-            <a:r>
-              <a:rPr lang="en-US" sz="1350" dirty="0">
-                <a:solidFill>
-                  <a:srgbClr val="C9D7F5"/>
-                </a:solidFill>
-                <a:latin typeface="Calibri" pitchFamily="34" charset="0"/>
-                <a:ea typeface="Calibri" pitchFamily="34" charset="-122"/>
-                <a:cs typeface="Calibri" pitchFamily="34" charset="-120"/>
-              </a:rPr>
-              <a:t>Linked from every page of the app via NEXT_PUBLIC_FEEDBACK_URL.</a:t>
-            </a:r>
-            <a:endParaRPr lang="en-US" sz="1350" dirty="0"/>
-          </a:p>
-        </p:txBody>
-      </p:sp>
       <p:pic>
         <p:nvPicPr>
           <p:cNvPr id="10" name="Image 0" descr="EdSynapse logo"/>
@@ -5183,7 +7820,7 @@
 </p:sld>
 </file>
 
-<file path=ppt/slides/slide6.xml><?xml version="1.0" encoding="utf-8"?>
+<file path=ppt/slides/slide8.xml><?xml version="1.0" encoding="utf-8"?>
 <p:sld xmlns:a="http://schemas.openxmlformats.org/drawingml/2006/main" xmlns:r="http://schemas.openxmlformats.org/officeDocument/2006/relationships" xmlns:p="http://schemas.openxmlformats.org/presentationml/2006/main">
   <p:cSld name="Slide 6">
     <p:bg>
@@ -6061,6 +8698,9 @@
   <wetp:taskpane dockstate="right" visibility="0" width="700" row="0">
     <wetp:webextensionref xmlns:r="http://schemas.openxmlformats.org/officeDocument/2006/relationships" r:id="rId1"/>
   </wetp:taskpane>
+  <wetp:taskpane dockstate="right" visibility="0" width="438" row="0">
+    <wetp:webextensionref xmlns:r="http://schemas.openxmlformats.org/officeDocument/2006/relationships" r:id="rId2"/>
+  </wetp:taskpane>
 </wetp:taskpanes>
 </file>
 
@@ -6076,4 +8716,18 @@
   <we:bindings/>
   <we:snapshot xmlns:r="http://schemas.openxmlformats.org/officeDocument/2006/relationships"/>
 </we:webextension>
+</file>
+
+<file path=ppt/webextensions/webextension2.xml><?xml version="1.0" encoding="utf-8"?>
+<we:webextension xmlns:we="http://schemas.microsoft.com/office/webextensions/webextension/2010/11" id="{4031BEA0-8C5B-4854-B1E6-9A4FF504ED35}">
+  <we:reference id="wa200010001" version="1.0.0.1" store="en-CA" storeType="OMEX"/>
+  <we:alternateReferences>
+    <we:reference id="WA200010001" version="1.0.0.1" store="" storeType="OMEX"/>
+  </we:alternateReferences>
+  <we:properties>
+    <we:property name="claude.fileId" value="&quot;a4770453-d6da-4cd3-8cc2-6ee6ca17be52&quot;"/>
+  </we:properties>
+  <we:bindings/>
+  <we:snapshot xmlns:r="http://schemas.openxmlformats.org/officeDocument/2006/relationships"/>
+</we:webextension>
 </file>